--- a/lecons/F3/39_FORM4_LESSON35_Precipitation.pptx
+++ b/lecons/F3/39_FORM4_LESSON35_Precipitation.pptx
@@ -50,9 +50,12 @@
     <p:sldId id="298" r:id="rId44"/>
     <p:sldId id="299" r:id="rId45"/>
     <p:sldId id="300" r:id="rId46"/>
+    <p:sldId id="301" r:id="rId47"/>
+    <p:sldId id="302" r:id="rId48"/>
+    <p:sldId id="303" r:id="rId49"/>
   </p:sldIdLst>
   <p:notesMasterIdLst>
-    <p:notesMasterId r:id="rId47"/>
+    <p:notesMasterId r:id="rId50"/>
   </p:notesMasterIdLst>
   <p:sldSz cx="12192000" cy="6858000"/>
   <p:notesSz cx="6858000" cy="12192000"/>
@@ -722,7 +725,7 @@
           <a:p>
             <a:r>
               <a:rPr lang="en-US" dirty="0"/>
-              <a:t>Good. Emmanuel does not know why the rain is different in the two towns.</a:t>
+              <a:t>Good. Emmanuel does not know why rain differs from place to place and how rain is measured.</a:t>
             </a:r>
             <a:endParaRPr lang="en-US" dirty="0"/>
           </a:p>
@@ -810,7 +813,7 @@
           <a:p>
             <a:r>
               <a:rPr lang="en-US" dirty="0"/>
-              <a:t>Question 2: How does it rain in Garoua? Think for a moment, then raise your hand to answer.</a:t>
+              <a:t>Question 2: Describe the rain in Garoua. Think for a moment, then raise your hand to answer.</a:t>
             </a:r>
             <a:endParaRPr lang="en-US" dirty="0"/>
           </a:p>
@@ -898,7 +901,7 @@
           <a:p>
             <a:r>
               <a:rPr lang="en-US" dirty="0"/>
-              <a:t>Good. Short, heavy storms in the afternoon.</a:t>
+              <a:t>Good. Short, heavy afternoon storms.</a:t>
             </a:r>
             <a:endParaRPr lang="en-US" dirty="0"/>
           </a:p>
@@ -986,7 +989,7 @@
           <a:p>
             <a:r>
               <a:rPr lang="en-US" dirty="0"/>
-              <a:t>Question 3: Why does it rain so much in Buea? Think for a moment, then raise your hand to answer.</a:t>
+              <a:t>Question 3: Why does Buea receive so much rain? Think for a moment, then raise your hand to answer.</a:t>
             </a:r>
             <a:endParaRPr lang="en-US" dirty="0"/>
           </a:p>
@@ -1074,7 +1077,7 @@
           <a:p>
             <a:r>
               <a:rPr lang="en-US" dirty="0"/>
-              <a:t>Good. The mountain forces wet air to rise.</a:t>
+              <a:t>Good. Moist sea air is forced up Mount Cameroon and cools.</a:t>
             </a:r>
             <a:endParaRPr lang="en-US" dirty="0"/>
           </a:p>
@@ -1426,7 +1429,7 @@
           <a:p>
             <a:r>
               <a:rPr lang="en-US" dirty="0"/>
-              <a:t>Here is the question for Activity 1: Rain, hail and snow fall from clouds. What is their general name? Take one minute to think and write your answer in your rough notebook.</a:t>
+              <a:t>Here is the question for Activity 1: Rain, hail and snow all fall from clouds. What is their general name? Take one minute to think and write your answer in your rough notebook.</a:t>
             </a:r>
             <a:endParaRPr lang="en-US" dirty="0"/>
           </a:p>
@@ -1690,7 +1693,7 @@
           <a:p>
             <a:r>
               <a:rPr lang="en-US" dirty="0"/>
-              <a:t>Activity 2. Look carefully at this picture: a rain gauge. Observe every detail before I ask the question.</a:t>
+              <a:t>Activity 2. Look carefully at this picture: an instrument in an open place. Observe every detail before I ask the question.</a:t>
             </a:r>
             <a:endParaRPr lang="en-US" dirty="0"/>
           </a:p>
@@ -1778,7 +1781,7 @@
           <a:p>
             <a:r>
               <a:rPr lang="en-US" dirty="0"/>
-              <a:t>Here is the question for Activity 2: What does this instrument measure? In which unit? Take one minute to think and write your answer in your rough notebook.</a:t>
+              <a:t>Here is the question for Activity 2: What does this instrument measure? Take one minute to think and write your answer in your rough notebook.</a:t>
             </a:r>
             <a:endParaRPr lang="en-US" dirty="0"/>
           </a:p>
@@ -1866,7 +1869,7 @@
           <a:p>
             <a:r>
               <a:rPr lang="en-US" dirty="0"/>
-              <a:t>Let us check the answer together. Rainfall, in millimetres (mm).</a:t>
+              <a:t>Let us check the answer together. Rainfall.</a:t>
             </a:r>
             <a:endParaRPr lang="en-US" dirty="0"/>
           </a:p>
@@ -1954,7 +1957,7 @@
           <a:p>
             <a:r>
               <a:rPr lang="en-US" dirty="0"/>
-              <a:t>Activity 3. Look carefully at this animation: animation: the storms of Garoua. Watch the animation to the end; it will play again.</a:t>
+              <a:t>Here is the next question: In which unit? Take one minute to think and write your answer in your rough notebook.</a:t>
             </a:r>
             <a:endParaRPr lang="en-US" dirty="0"/>
           </a:p>
@@ -2042,7 +2045,7 @@
           <a:p>
             <a:r>
               <a:rPr lang="en-US" dirty="0"/>
-              <a:t>Here is the question for Activity 3: The hot ground heats the air, which rises and makes storms. What type of rain is this? Take one minute to think and write your answer in your rough notebook.</a:t>
+              <a:t>Let us check the answer together. In millimetres (mm).</a:t>
             </a:r>
             <a:endParaRPr lang="en-US" dirty="0"/>
           </a:p>
@@ -2130,7 +2133,7 @@
           <a:p>
             <a:r>
               <a:rPr lang="en-US" dirty="0"/>
-              <a:t>Let us check the answer together. Convectional rain.</a:t>
+              <a:t>Activity 3. Look carefully at this animation: animation: hot air rises. Watch the animation to the end; it will play again.</a:t>
             </a:r>
             <a:endParaRPr lang="en-US" dirty="0"/>
           </a:p>
@@ -2218,7 +2221,7 @@
           <a:p>
             <a:r>
               <a:rPr lang="en-US" dirty="0"/>
-              <a:t>Now we are going to copy the board summary. Write the title and the headings neatly in your notebooks. I will give you enough time for each slide, so do not rush.</a:t>
+              <a:t>Here is the question for Activity 3: The hot ground heats the air, which rises and makes storms. What type of rain is this? Take one minute to think and write your answer in your rough notebook.</a:t>
             </a:r>
             <a:endParaRPr lang="en-US" dirty="0"/>
           </a:p>
@@ -2306,7 +2309,7 @@
           <a:p>
             <a:r>
               <a:rPr lang="en-US" dirty="0"/>
-              <a:t>Let us copy Meaning and Forms of Precipitation. Precipitation is defined and takes the following forms. On this slide we have Precipitation and Rain and drizzle. Write each point on a new line, with the key term first, and explain it in your own words when we revise. When you finish, we go to the next slide.</a:t>
+              <a:t>Let us check the answer together. Convectional rain.</a:t>
             </a:r>
             <a:endParaRPr lang="en-US" dirty="0"/>
           </a:p>
@@ -2394,7 +2397,7 @@
           <a:p>
             <a:r>
               <a:rPr lang="en-US" dirty="0"/>
-              <a:t>We continue with Meaning and Forms of Precipitation. On this slide we have Hail and Snow. Write each point on a new line, with the key term first, and explain it in your own words when we revise.</a:t>
+              <a:t>Now we are going to copy the board summary. Write the title and the headings neatly in your notebooks. I will give you enough time for each slide, so do not rush.</a:t>
             </a:r>
             <a:endParaRPr lang="en-US" dirty="0"/>
           </a:p>
@@ -2570,7 +2573,7 @@
           <a:p>
             <a:r>
               <a:rPr lang="en-US" dirty="0"/>
-              <a:t>Let us copy Measurement of Rainfall. Rainfall is measured as follows. On this slide we have Rain gauge. Write each point on a new line, with the key term first, and explain it in your own words when we revise.</a:t>
+              <a:t>Let us copy the definitions. The key terms of this lesson are defined as follows. On this slide we have Precipitation and Rain. Write each point on a new line, with the key term first, and explain it in your own words when we revise. When you finish, we go to the next slide.</a:t>
             </a:r>
             <a:endParaRPr lang="en-US" dirty="0"/>
           </a:p>
@@ -2658,7 +2661,7 @@
           <a:p>
             <a:r>
               <a:rPr lang="en-US" dirty="0"/>
-              <a:t>Let us copy Types of Rainfall. There are three types of rainfall. On this slide we have Convectional rainfall and Relief rainfall. Write each point on a new line, with the key term first, and explain it in your own words when we revise. When you finish, we go to the next slide.</a:t>
+              <a:t>We continue with the definitions. On this slide we have Hail, Snow and Drizzle. Write each point on a new line, with the key term first, and explain it in your own words when we revise.</a:t>
             </a:r>
             <a:endParaRPr lang="en-US" dirty="0"/>
           </a:p>
@@ -2746,7 +2749,7 @@
           <a:p>
             <a:r>
               <a:rPr lang="en-US" dirty="0"/>
-              <a:t>We continue with Types of Rainfall. On this slide we have Frontal rainfall. Write each point on a new line, with the key term first, and explain it in your own words when we revise.</a:t>
+              <a:t>Let us copy Measurement of Rainfall. Rainfall is measured as follows. Copy the point on Rain gauge (pluviometer) on the left, then draw the diagram on the right: a rain gauge. Give it a title and label it clearly.</a:t>
             </a:r>
             <a:endParaRPr lang="en-US" dirty="0"/>
           </a:p>
@@ -2834,7 +2837,7 @@
           <a:p>
             <a:r>
               <a:rPr lang="en-US" dirty="0"/>
-              <a:t>Now draw this illustration in your notebook: types of rainfall. Give it a title and label it clearly.</a:t>
+              <a:t>We continue with Measurement of Rainfall. On this slide we have Reading and Siting. Write each point on a new line, with the key term first, and explain it in your own words when we revise. When you finish, we go to the next slide.</a:t>
             </a:r>
             <a:endParaRPr lang="en-US" dirty="0"/>
           </a:p>
@@ -2922,7 +2925,7 @@
           <a:p>
             <a:r>
               <a:rPr lang="en-US" dirty="0"/>
-              <a:t>Now let us check what you have understood. Question 1: Which instrument measures rainfall? Answer in your exercise book.</a:t>
+              <a:t>We continue with Measurement of Rainfall. On this slide we have Presentation. Write each point on a new line, with the key term first, and explain it in your own words when we revise.</a:t>
             </a:r>
             <a:endParaRPr lang="en-US" dirty="0"/>
           </a:p>
@@ -3010,7 +3013,7 @@
           <a:p>
             <a:r>
               <a:rPr lang="en-US" dirty="0"/>
-              <a:t>The expected answer is: the rain gauge. If you got it right, well done.</a:t>
+              <a:t>Let us copy Types of Rainfall. There are three types of rainfall. Copy the point on Convectional rainfall on the left, then draw the diagram on the right: types of rainfall. Give it a title and label it clearly.</a:t>
             </a:r>
             <a:endParaRPr lang="en-US" dirty="0"/>
           </a:p>
@@ -3098,7 +3101,7 @@
           <a:p>
             <a:r>
               <a:rPr lang="en-US" dirty="0"/>
-              <a:t>Now let us check what you have understood. Question 2: Why does Buea receive a lot of rain? Answer in your exercise book.</a:t>
+              <a:t>We continue with Types of Rainfall. On this slide we have Relief (orographic) rainfall and Frontal (cyclonic) rainfall. Write each point on a new line, with the key term first, and explain it in your own words when we revise.</a:t>
             </a:r>
             <a:endParaRPr lang="en-US" dirty="0"/>
           </a:p>
@@ -3186,7 +3189,7 @@
           <a:p>
             <a:r>
               <a:rPr lang="en-US" dirty="0"/>
-              <a:t>The expected answer is: mount Cameroon forces wet air to rise (relief rain). If you got it right, well done.</a:t>
+              <a:t>Now let us check what you have understood. Question 1: Which instrument measures rainfall? Answer in your exercise book.</a:t>
             </a:r>
             <a:endParaRPr lang="en-US" dirty="0"/>
           </a:p>
@@ -3274,7 +3277,7 @@
           <a:p>
             <a:r>
               <a:rPr lang="en-US" dirty="0"/>
-              <a:t>For those who need more practice, fill in the blanks in your exercise book. The answers are: number 1, precipitation; number 2, hail; number 3, relief.</a:t>
+              <a:t>The expected answer is: the rain gauge. If you got it right, well done.</a:t>
             </a:r>
             <a:endParaRPr lang="en-US" dirty="0"/>
           </a:p>
@@ -3362,7 +3365,7 @@
           <a:p>
             <a:r>
               <a:rPr lang="en-US" dirty="0"/>
-              <a:t>For your homework: Observe the wind in Garoua for three days: from which direction does it blow? Is it dry or moist? Write your observations. We shall correct it at the beginning of our next lesson.</a:t>
+              <a:t>Now let us check what you have understood. Question 2: Why does Buea receive a lot of rain? Answer in your exercise book.</a:t>
             </a:r>
             <a:endParaRPr lang="en-US" dirty="0"/>
           </a:p>
@@ -3538,7 +3541,7 @@
           <a:p>
             <a:r>
               <a:rPr lang="en-US" dirty="0"/>
-              <a:t>Our next lesson will be on Lesson 36: Pressure Belts and Planetary Winds. Thank you for your attention, and see you next time.</a:t>
+              <a:t>The expected answer is: mount Cameroon forces wet air to rise (relief rain). If you got it right, well done.</a:t>
             </a:r>
             <a:endParaRPr lang="en-US" dirty="0"/>
           </a:p>
@@ -3626,7 +3629,7 @@
           <a:p>
             <a:r>
               <a:rPr lang="en-US" dirty="0"/>
-              <a:t>Let us play the bilingual game. I say a word in English, and you give me the French word. Then we do the reverse.</a:t>
+              <a:t>For those who need more practice, fill in the blanks in your exercise book. The answers are: number 1, precipitation; number 2, hail; number 3, relief.</a:t>
             </a:r>
             <a:endParaRPr lang="en-US" dirty="0"/>
           </a:p>
@@ -3714,7 +3717,7 @@
           <a:p>
             <a:r>
               <a:rPr lang="en-US" dirty="0"/>
-              <a:t>I record this information in the official logbook of the class after the lesson.</a:t>
+              <a:t>For your homework: Observe the wind in Garoua for three days: from which direction does it blow? Is it dry or moist? Write your observations. We shall correct it at the beginning of our next lesson.</a:t>
             </a:r>
             <a:endParaRPr lang="en-US" dirty="0"/>
           </a:p>
@@ -3802,7 +3805,7 @@
           <a:p>
             <a:r>
               <a:rPr lang="en-US" dirty="0"/>
-              <a:t>I complete the second page of the logbook: the matter taught, the evaluation, the homework and the attendance.</a:t>
+              <a:t>Our next lesson will be on Lesson 36: Pressure Belts and Planetary Winds. Thank you for your attention, and see you next time.</a:t>
             </a:r>
             <a:endParaRPr lang="en-US" dirty="0"/>
           </a:p>
@@ -3890,7 +3893,7 @@
           <a:p>
             <a:r>
               <a:rPr lang="en-US" dirty="0"/>
-              <a:t>This slide is for me, the teacher: it gives the timing of the lesson and what to do if the projector is not available.</a:t>
+              <a:t>Let us play the bilingual game. I say a word in English, and you give me the French word. Then we do the reverse.</a:t>
             </a:r>
             <a:endParaRPr lang="en-US" dirty="0"/>
           </a:p>
@@ -3978,7 +3981,7 @@
           <a:p>
             <a:r>
               <a:rPr lang="en-US" dirty="0"/>
-              <a:t>These are the references and picture credits used to prepare this lesson.</a:t>
+              <a:t>I record this information in the official logbook of the class after the lesson.</a:t>
             </a:r>
             <a:endParaRPr lang="en-US" dirty="0"/>
           </a:p>
@@ -4002,6 +4005,270 @@
             <a:fld id="{F7021451-1387-4CA6-816F-3879F97B5CBC}" type="slidenum">
               <a:rPr lang="en-US"/>
               <a:t>45</a:t>
+            </a:fld>
+            <a:endParaRPr lang="en-US"/>
+          </a:p>
+        </p:txBody>
+      </p:sp>
+    </p:spTree>
+    <p:extLst>
+      <p:ext uri="{BB962C8B-B14F-4D97-AF65-F5344CB8AC3E}">
+        <p14:creationId xmlns:p14="http://schemas.microsoft.com/office/powerpoint/2010/main" val="1024086991"/>
+      </p:ext>
+    </p:extLst>
+  </p:cSld>
+  <p:clrMapOvr>
+    <a:masterClrMapping/>
+  </p:clrMapOvr>
+</p:notes>
+</file>
+
+<file path=ppt/notesSlides/notesSlide46.xml><?xml version="1.0" encoding="utf-8"?>
+<p:notes xmlns:a="http://schemas.openxmlformats.org/drawingml/2006/main" xmlns:r="http://schemas.openxmlformats.org/officeDocument/2006/relationships" xmlns:p="http://schemas.openxmlformats.org/presentationml/2006/main">
+  <p:cSld>
+    <p:spTree>
+      <p:nvGrpSpPr>
+        <p:cNvPr id="1" name=""/>
+        <p:cNvGrpSpPr/>
+        <p:nvPr/>
+      </p:nvGrpSpPr>
+      <p:grpSpPr>
+        <a:xfrm>
+          <a:off x="0" y="0"/>
+          <a:ext cx="0" cy="0"/>
+          <a:chOff x="0" y="0"/>
+          <a:chExt cx="0" cy="0"/>
+        </a:xfrm>
+      </p:grpSpPr>
+      <p:sp>
+        <p:nvSpPr>
+          <p:cNvPr id="2" name="Slide Image Placeholder 1"/>
+          <p:cNvSpPr>
+            <a:spLocks noGrp="1" noRot="1" noChangeAspect="1"/>
+          </p:cNvSpPr>
+          <p:nvPr>
+            <p:ph type="sldImg"/>
+          </p:nvPr>
+        </p:nvSpPr>
+        <p:spPr/>
+      </p:sp>
+      <p:sp>
+        <p:nvSpPr>
+          <p:cNvPr id="3" name="Notes Placeholder 2"/>
+          <p:cNvSpPr>
+            <a:spLocks noGrp="1"/>
+          </p:cNvSpPr>
+          <p:nvPr>
+            <p:ph type="body" idx="1"/>
+          </p:nvPr>
+        </p:nvSpPr>
+        <p:spPr/>
+        <p:txBody>
+          <a:bodyPr/>
+          <a:lstStyle/>
+          <a:p>
+            <a:r>
+              <a:rPr lang="en-US" dirty="0"/>
+              <a:t>I complete the second page of the logbook: the matter taught, the evaluation, the homework and the attendance.</a:t>
+            </a:r>
+            <a:endParaRPr lang="en-US" dirty="0"/>
+          </a:p>
+        </p:txBody>
+      </p:sp>
+      <p:sp>
+        <p:nvSpPr>
+          <p:cNvPr id="4" name="Slide Number Placeholder 3"/>
+          <p:cNvSpPr>
+            <a:spLocks noGrp="1"/>
+          </p:cNvSpPr>
+          <p:nvPr>
+            <p:ph type="sldNum" sz="quarter" idx="10"/>
+          </p:nvPr>
+        </p:nvSpPr>
+        <p:spPr/>
+        <p:txBody>
+          <a:bodyPr/>
+          <a:lstStyle/>
+          <a:p>
+            <a:fld id="{F7021451-1387-4CA6-816F-3879F97B5CBC}" type="slidenum">
+              <a:rPr lang="en-US"/>
+              <a:t>46</a:t>
+            </a:fld>
+            <a:endParaRPr lang="en-US"/>
+          </a:p>
+        </p:txBody>
+      </p:sp>
+    </p:spTree>
+    <p:extLst>
+      <p:ext uri="{BB962C8B-B14F-4D97-AF65-F5344CB8AC3E}">
+        <p14:creationId xmlns:p14="http://schemas.microsoft.com/office/powerpoint/2010/main" val="1024086991"/>
+      </p:ext>
+    </p:extLst>
+  </p:cSld>
+  <p:clrMapOvr>
+    <a:masterClrMapping/>
+  </p:clrMapOvr>
+</p:notes>
+</file>
+
+<file path=ppt/notesSlides/notesSlide47.xml><?xml version="1.0" encoding="utf-8"?>
+<p:notes xmlns:a="http://schemas.openxmlformats.org/drawingml/2006/main" xmlns:r="http://schemas.openxmlformats.org/officeDocument/2006/relationships" xmlns:p="http://schemas.openxmlformats.org/presentationml/2006/main">
+  <p:cSld>
+    <p:spTree>
+      <p:nvGrpSpPr>
+        <p:cNvPr id="1" name=""/>
+        <p:cNvGrpSpPr/>
+        <p:nvPr/>
+      </p:nvGrpSpPr>
+      <p:grpSpPr>
+        <a:xfrm>
+          <a:off x="0" y="0"/>
+          <a:ext cx="0" cy="0"/>
+          <a:chOff x="0" y="0"/>
+          <a:chExt cx="0" cy="0"/>
+        </a:xfrm>
+      </p:grpSpPr>
+      <p:sp>
+        <p:nvSpPr>
+          <p:cNvPr id="2" name="Slide Image Placeholder 1"/>
+          <p:cNvSpPr>
+            <a:spLocks noGrp="1" noRot="1" noChangeAspect="1"/>
+          </p:cNvSpPr>
+          <p:nvPr>
+            <p:ph type="sldImg"/>
+          </p:nvPr>
+        </p:nvSpPr>
+        <p:spPr/>
+      </p:sp>
+      <p:sp>
+        <p:nvSpPr>
+          <p:cNvPr id="3" name="Notes Placeholder 2"/>
+          <p:cNvSpPr>
+            <a:spLocks noGrp="1"/>
+          </p:cNvSpPr>
+          <p:nvPr>
+            <p:ph type="body" idx="1"/>
+          </p:nvPr>
+        </p:nvSpPr>
+        <p:spPr/>
+        <p:txBody>
+          <a:bodyPr/>
+          <a:lstStyle/>
+          <a:p>
+            <a:r>
+              <a:rPr lang="en-US" dirty="0"/>
+              <a:t>This slide is for me, the teacher: it gives the timing of the lesson and what to do if the projector is not available.</a:t>
+            </a:r>
+            <a:endParaRPr lang="en-US" dirty="0"/>
+          </a:p>
+        </p:txBody>
+      </p:sp>
+      <p:sp>
+        <p:nvSpPr>
+          <p:cNvPr id="4" name="Slide Number Placeholder 3"/>
+          <p:cNvSpPr>
+            <a:spLocks noGrp="1"/>
+          </p:cNvSpPr>
+          <p:nvPr>
+            <p:ph type="sldNum" sz="quarter" idx="10"/>
+          </p:nvPr>
+        </p:nvSpPr>
+        <p:spPr/>
+        <p:txBody>
+          <a:bodyPr/>
+          <a:lstStyle/>
+          <a:p>
+            <a:fld id="{F7021451-1387-4CA6-816F-3879F97B5CBC}" type="slidenum">
+              <a:rPr lang="en-US"/>
+              <a:t>47</a:t>
+            </a:fld>
+            <a:endParaRPr lang="en-US"/>
+          </a:p>
+        </p:txBody>
+      </p:sp>
+    </p:spTree>
+    <p:extLst>
+      <p:ext uri="{BB962C8B-B14F-4D97-AF65-F5344CB8AC3E}">
+        <p14:creationId xmlns:p14="http://schemas.microsoft.com/office/powerpoint/2010/main" val="1024086991"/>
+      </p:ext>
+    </p:extLst>
+  </p:cSld>
+  <p:clrMapOvr>
+    <a:masterClrMapping/>
+  </p:clrMapOvr>
+</p:notes>
+</file>
+
+<file path=ppt/notesSlides/notesSlide48.xml><?xml version="1.0" encoding="utf-8"?>
+<p:notes xmlns:a="http://schemas.openxmlformats.org/drawingml/2006/main" xmlns:r="http://schemas.openxmlformats.org/officeDocument/2006/relationships" xmlns:p="http://schemas.openxmlformats.org/presentationml/2006/main">
+  <p:cSld>
+    <p:spTree>
+      <p:nvGrpSpPr>
+        <p:cNvPr id="1" name=""/>
+        <p:cNvGrpSpPr/>
+        <p:nvPr/>
+      </p:nvGrpSpPr>
+      <p:grpSpPr>
+        <a:xfrm>
+          <a:off x="0" y="0"/>
+          <a:ext cx="0" cy="0"/>
+          <a:chOff x="0" y="0"/>
+          <a:chExt cx="0" cy="0"/>
+        </a:xfrm>
+      </p:grpSpPr>
+      <p:sp>
+        <p:nvSpPr>
+          <p:cNvPr id="2" name="Slide Image Placeholder 1"/>
+          <p:cNvSpPr>
+            <a:spLocks noGrp="1" noRot="1" noChangeAspect="1"/>
+          </p:cNvSpPr>
+          <p:nvPr>
+            <p:ph type="sldImg"/>
+          </p:nvPr>
+        </p:nvSpPr>
+        <p:spPr/>
+      </p:sp>
+      <p:sp>
+        <p:nvSpPr>
+          <p:cNvPr id="3" name="Notes Placeholder 2"/>
+          <p:cNvSpPr>
+            <a:spLocks noGrp="1"/>
+          </p:cNvSpPr>
+          <p:nvPr>
+            <p:ph type="body" idx="1"/>
+          </p:nvPr>
+        </p:nvSpPr>
+        <p:spPr/>
+        <p:txBody>
+          <a:bodyPr/>
+          <a:lstStyle/>
+          <a:p>
+            <a:r>
+              <a:rPr lang="en-US" dirty="0"/>
+              <a:t>These are the references and picture credits used to prepare this lesson.</a:t>
+            </a:r>
+            <a:endParaRPr lang="en-US" dirty="0"/>
+          </a:p>
+        </p:txBody>
+      </p:sp>
+      <p:sp>
+        <p:nvSpPr>
+          <p:cNvPr id="4" name="Slide Number Placeholder 3"/>
+          <p:cNvSpPr>
+            <a:spLocks noGrp="1"/>
+          </p:cNvSpPr>
+          <p:nvPr>
+            <p:ph type="sldNum" sz="quarter" idx="10"/>
+          </p:nvPr>
+        </p:nvSpPr>
+        <p:spPr/>
+        <p:txBody>
+          <a:bodyPr/>
+          <a:lstStyle/>
+          <a:p>
+            <a:fld id="{F7021451-1387-4CA6-816F-3879F97B5CBC}" type="slidenum">
+              <a:rPr lang="en-US"/>
+              <a:t>48</a:t>
             </a:fld>
             <a:endParaRPr lang="en-US"/>
           </a:p>
@@ -4418,7 +4685,7 @@
           <a:p>
             <a:r>
               <a:rPr lang="en-US" dirty="0"/>
-              <a:t>Listen carefully to this situation from real life. In September, Garoua has short, heavy afternoon storms. Emmanuel's cousin in Buea, on Mount Cameroon, says that it rains there for many days without stopping. Think about it, because I am going to ask you some questions.</a:t>
+              <a:t>Listen carefully to this situation from real life. In September, Garoua has short, heavy afternoon storms. Emmanuel's cousin in Buea, on the slopes of Mount Cameroon, says that it rains there for many days without stopping. Emmanuel asks: "Why does it rain differently in the two towns, and how do we measure the rain?" Think about it, because I am going to ask you some questions.</a:t>
             </a:r>
             <a:endParaRPr lang="en-US" dirty="0"/>
           </a:p>
@@ -6101,7 +6368,7 @@
                 <a:ea typeface="Times New Roman" pitchFamily="34" charset="-122"/>
                 <a:cs typeface="Times New Roman" pitchFamily="34" charset="-120"/>
               </a:rPr>
-              <a:t>Emmanuel does not know why the rain is different in the two towns.</a:t>
+              <a:t>Emmanuel does not know why rain differs from place to place and how rain is measured.</a:t>
             </a:r>
             <a:endParaRPr lang="en-US" sz="4000" dirty="0"/>
           </a:p>
@@ -6320,7 +6587,7 @@
                 <a:ea typeface="Times New Roman" pitchFamily="34" charset="-122"/>
                 <a:cs typeface="Times New Roman" pitchFamily="34" charset="-120"/>
               </a:rPr>
-              <a:t>How does it rain in Garoua?</a:t>
+              <a:t>Describe the rain in Garoua.</a:t>
             </a:r>
             <a:endParaRPr lang="en-US" sz="4000" dirty="0"/>
           </a:p>
@@ -6539,7 +6806,7 @@
                 <a:ea typeface="Times New Roman" pitchFamily="34" charset="-122"/>
                 <a:cs typeface="Times New Roman" pitchFamily="34" charset="-120"/>
               </a:rPr>
-              <a:t>Short, heavy storms in the afternoon.</a:t>
+              <a:t>Short, heavy afternoon storms.</a:t>
             </a:r>
             <a:endParaRPr lang="en-US" sz="4000" dirty="0"/>
           </a:p>
@@ -6758,7 +7025,7 @@
                 <a:ea typeface="Times New Roman" pitchFamily="34" charset="-122"/>
                 <a:cs typeface="Times New Roman" pitchFamily="34" charset="-120"/>
               </a:rPr>
-              <a:t>Why does it rain so much in Buea?</a:t>
+              <a:t>Why does Buea receive so much rain?</a:t>
             </a:r>
             <a:endParaRPr lang="en-US" sz="4000" dirty="0"/>
           </a:p>
@@ -6977,7 +7244,7 @@
                 <a:ea typeface="Times New Roman" pitchFamily="34" charset="-122"/>
                 <a:cs typeface="Times New Roman" pitchFamily="34" charset="-120"/>
               </a:rPr>
-              <a:t>The mountain forces wet air to rise.</a:t>
+              <a:t>Moist sea air is forced up Mount Cameroon and cools.</a:t>
             </a:r>
             <a:endParaRPr lang="en-US" sz="4000" dirty="0"/>
           </a:p>
@@ -7527,7 +7794,7 @@
                 <a:ea typeface="Calibri" pitchFamily="34" charset="-122"/>
                 <a:cs typeface="Calibri" pitchFamily="34" charset="-120"/>
               </a:rPr>
-              <a:t>1. MEANING AND FORMS</a:t>
+              <a:t>DEFINITIONS</a:t>
             </a:r>
             <a:endParaRPr lang="en-US" sz="1400" dirty="0"/>
           </a:p>
@@ -7741,7 +8008,7 @@
                 <a:ea typeface="Calibri" pitchFamily="34" charset="-122"/>
                 <a:cs typeface="Calibri" pitchFamily="34" charset="-120"/>
               </a:rPr>
-              <a:t>1. MEANING AND FORMS</a:t>
+              <a:t>DEFINITIONS</a:t>
             </a:r>
             <a:endParaRPr lang="en-US" sz="1400" dirty="0"/>
           </a:p>
@@ -7848,7 +8115,7 @@
                 <a:ea typeface="Times New Roman" pitchFamily="34" charset="-122"/>
                 <a:cs typeface="Times New Roman" pitchFamily="34" charset="-120"/>
               </a:rPr>
-              <a:t>Rain, hail and snow fall from clouds. What is their general name?</a:t>
+              <a:t>Rain, hail and snow all fall from clouds. What is their general name?</a:t>
             </a:r>
             <a:endParaRPr lang="en-US" sz="4000" dirty="0"/>
           </a:p>
@@ -8555,7 +8822,7 @@
                 <a:ea typeface="Calibri" pitchFamily="34" charset="-122"/>
                 <a:cs typeface="Calibri" pitchFamily="34" charset="-120"/>
               </a:rPr>
-              <a:t>1. MEANING AND FORMS</a:t>
+              <a:t>DEFINITIONS</a:t>
             </a:r>
             <a:endParaRPr lang="en-US" sz="1400" dirty="0"/>
           </a:p>
@@ -8774,7 +9041,7 @@
                 <a:ea typeface="Calibri" pitchFamily="34" charset="-122"/>
                 <a:cs typeface="Calibri" pitchFamily="34" charset="-120"/>
               </a:rPr>
-              <a:t>2. MEASUREMENT</a:t>
+              <a:t>1. MEASUREMENT</a:t>
             </a:r>
             <a:endParaRPr lang="en-US" sz="1400" dirty="0"/>
           </a:p>
@@ -8876,7 +9143,7 @@
                 <a:ea typeface="Times New Roman" pitchFamily="34" charset="-122"/>
                 <a:cs typeface="Times New Roman" pitchFamily="34" charset="-120"/>
               </a:rPr>
-              <a:t>A rain gauge.</a:t>
+              <a:t>An instrument in an open place.</a:t>
             </a:r>
             <a:endParaRPr lang="en-US" sz="1800" dirty="0"/>
           </a:p>
@@ -8988,7 +9255,7 @@
                 <a:ea typeface="Calibri" pitchFamily="34" charset="-122"/>
                 <a:cs typeface="Calibri" pitchFamily="34" charset="-120"/>
               </a:rPr>
-              <a:t>2. MEASUREMENT</a:t>
+              <a:t>1. MEASUREMENT</a:t>
             </a:r>
             <a:endParaRPr lang="en-US" sz="1400" dirty="0"/>
           </a:p>
@@ -9053,7 +9320,7 @@
                 <a:ea typeface="Times New Roman" pitchFamily="34" charset="-122"/>
                 <a:cs typeface="Times New Roman" pitchFamily="34" charset="-120"/>
               </a:rPr>
-              <a:t>Activity 2: Question</a:t>
+              <a:t>Activity 2: Question 1</a:t>
             </a:r>
             <a:endParaRPr lang="en-US" sz="3600" dirty="0"/>
           </a:p>
@@ -9095,7 +9362,7 @@
                 <a:ea typeface="Times New Roman" pitchFamily="34" charset="-122"/>
                 <a:cs typeface="Times New Roman" pitchFamily="34" charset="-120"/>
               </a:rPr>
-              <a:t>What does this instrument measure? In which unit?</a:t>
+              <a:t>What does this instrument measure?</a:t>
             </a:r>
             <a:endParaRPr lang="en-US" sz="4000" dirty="0"/>
           </a:p>
@@ -9207,7 +9474,7 @@
                 <a:ea typeface="Calibri" pitchFamily="34" charset="-122"/>
                 <a:cs typeface="Calibri" pitchFamily="34" charset="-120"/>
               </a:rPr>
-              <a:t>2. MEASUREMENT</a:t>
+              <a:t>1. MEASUREMENT</a:t>
             </a:r>
             <a:endParaRPr lang="en-US" sz="1400" dirty="0"/>
           </a:p>
@@ -9272,7 +9539,7 @@
                 <a:ea typeface="Times New Roman" pitchFamily="34" charset="-122"/>
                 <a:cs typeface="Times New Roman" pitchFamily="34" charset="-120"/>
               </a:rPr>
-              <a:t>Activity 2: Answer</a:t>
+              <a:t>Activity 2: Answer 1</a:t>
             </a:r>
             <a:endParaRPr lang="en-US" sz="3600" dirty="0"/>
           </a:p>
@@ -9314,7 +9581,7 @@
                 <a:ea typeface="Times New Roman" pitchFamily="34" charset="-122"/>
                 <a:cs typeface="Times New Roman" pitchFamily="34" charset="-120"/>
               </a:rPr>
-              <a:t>Rainfall, in millimetres (mm).</a:t>
+              <a:t>Rainfall.</a:t>
             </a:r>
             <a:endParaRPr lang="en-US" sz="4000" dirty="0"/>
           </a:p>
@@ -9426,54 +9693,15 @@
                 <a:ea typeface="Calibri" pitchFamily="34" charset="-122"/>
                 <a:cs typeface="Calibri" pitchFamily="34" charset="-120"/>
               </a:rPr>
-              <a:t>3. TYPES OF RAINFALL</a:t>
+              <a:t>1. MEASUREMENT</a:t>
             </a:r>
             <a:endParaRPr lang="en-US" sz="1400" dirty="0"/>
-          </a:p>
-        </p:txBody>
-      </p:sp>
-      <p:sp>
-        <p:nvSpPr>
-          <p:cNvPr id="3" name="Text 1"/>
-          <p:cNvSpPr/>
-          <p:nvPr/>
-        </p:nvSpPr>
-        <p:spPr>
-          <a:xfrm>
-            <a:off x="457200" y="1005840"/>
-            <a:ext cx="11277295" cy="731520"/>
-          </a:xfrm>
-          <a:prstGeom prst="rect">
-            <a:avLst/>
-          </a:prstGeom>
-          <a:noFill/>
-          <a:ln/>
-        </p:spPr>
-        <p:txBody>
-          <a:bodyPr wrap="square" lIns="0" tIns="0" rIns="0" bIns="0" rtlCol="0" anchor="ctr"/>
-          <a:lstStyle/>
-          <a:p>
-            <a:pPr algn="ctr" indent="0" marL="0">
-              <a:buNone/>
-            </a:pPr>
-            <a:r>
-              <a:rPr lang="en-US" sz="3600" b="1" dirty="0">
-                <a:solidFill>
-                  <a:srgbClr val="990011"/>
-                </a:solidFill>
-                <a:latin typeface="Times New Roman" pitchFamily="34" charset="0"/>
-                <a:ea typeface="Times New Roman" pitchFamily="34" charset="-122"/>
-                <a:cs typeface="Times New Roman" pitchFamily="34" charset="-120"/>
-              </a:rPr>
-              <a:t>Activity 3</a:t>
-            </a:r>
-            <a:endParaRPr lang="en-US" sz="3600" dirty="0"/>
           </a:p>
         </p:txBody>
       </p:sp>
       <p:pic>
         <p:nvPicPr>
-          <p:cNvPr id="4" name="Image 0" descr="/home/claude/f4/img/v2/convection.gif">    </p:cNvPr>
+          <p:cNvPr id="3" name="Image 0" descr="/home/claude/f4/img/minesec_sheet.png">    </p:cNvPr>
           <p:cNvPicPr>
             <a:picLocks noChangeAspect="1"/>
           </p:cNvPicPr>
@@ -9487,8 +9715,8 @@
         </p:blipFill>
         <p:spPr>
           <a:xfrm>
-            <a:off x="629930" y="1783080"/>
-            <a:ext cx="10931835" cy="4270248"/>
+            <a:off x="0" y="658368"/>
+            <a:ext cx="5120640" cy="5833872"/>
           </a:xfrm>
           <a:prstGeom prst="rect">
             <a:avLst/>
@@ -9497,14 +9725,14 @@
       </p:pic>
       <p:sp>
         <p:nvSpPr>
-          <p:cNvPr id="5" name="Text 2"/>
+          <p:cNvPr id="4" name="Text 1"/>
           <p:cNvSpPr/>
           <p:nvPr/>
         </p:nvSpPr>
         <p:spPr>
           <a:xfrm>
-            <a:off x="457200" y="6089904"/>
-            <a:ext cx="11277295" cy="347472"/>
+            <a:off x="5349240" y="1005840"/>
+            <a:ext cx="6522415" cy="731520"/>
           </a:xfrm>
           <a:prstGeom prst="rect">
             <a:avLst/>
@@ -9513,24 +9741,68 @@
           <a:ln/>
         </p:spPr>
         <p:txBody>
-          <a:bodyPr wrap="square" lIns="0" tIns="0" rIns="0" bIns="0" rtlCol="0" anchor="ctr"/>
+          <a:bodyPr wrap="square" lIns="0" tIns="0" rIns="0" bIns="0" rtlCol="0" anchor="ctr">
+            <a:normAutofit/>
+          </a:bodyPr>
           <a:lstStyle/>
           <a:p>
             <a:pPr algn="ctr" indent="0" marL="0">
               <a:buNone/>
             </a:pPr>
             <a:r>
-              <a:rPr lang="en-US" sz="1800" i="1" dirty="0">
-                <a:solidFill>
-                  <a:srgbClr val="555555"/>
+              <a:rPr lang="en-US" sz="3600" b="1" dirty="0">
+                <a:solidFill>
+                  <a:srgbClr val="990011"/>
                 </a:solidFill>
                 <a:latin typeface="Times New Roman" pitchFamily="34" charset="0"/>
                 <a:ea typeface="Times New Roman" pitchFamily="34" charset="-122"/>
                 <a:cs typeface="Times New Roman" pitchFamily="34" charset="-120"/>
               </a:rPr>
-              <a:t>Animation: the storms of Garoua.</a:t>
-            </a:r>
-            <a:endParaRPr lang="en-US" sz="1800" dirty="0"/>
+              <a:t>Activity 2: Question 2</a:t>
+            </a:r>
+            <a:endParaRPr lang="en-US" sz="3600" dirty="0"/>
+          </a:p>
+        </p:txBody>
+      </p:sp>
+      <p:sp>
+        <p:nvSpPr>
+          <p:cNvPr id="5" name="Text 2"/>
+          <p:cNvSpPr/>
+          <p:nvPr/>
+        </p:nvSpPr>
+        <p:spPr>
+          <a:xfrm>
+            <a:off x="5349240" y="1783080"/>
+            <a:ext cx="6522415" cy="4663440"/>
+          </a:xfrm>
+          <a:prstGeom prst="rect">
+            <a:avLst/>
+          </a:prstGeom>
+          <a:noFill/>
+          <a:ln/>
+        </p:spPr>
+        <p:txBody>
+          <a:bodyPr wrap="square" lIns="0" tIns="0" rIns="0" bIns="0" rtlCol="0" anchor="t"/>
+          <a:lstStyle/>
+          <a:p>
+            <a:pPr algn="l" indent="0" marL="0">
+              <a:spcAft>
+                <a:spcPts val="800"/>
+              </a:spcAft>
+              <a:buNone/>
+            </a:pPr>
+            <a:r>
+              <a:rPr lang="en-US" sz="4000" dirty="0">
+                <a:solidFill>
+                  <a:srgbClr val="111111"/>
+                </a:solidFill>
+                <a:latin typeface="Times New Roman" pitchFamily="34" charset="0"/>
+                <a:ea typeface="Times New Roman" pitchFamily="34" charset="-122"/>
+                <a:cs typeface="Times New Roman" pitchFamily="34" charset="-120"/>
+              </a:rPr>
+              <a:t>In which unit?</a:t>
+            </a:r>
+            <a:endParaRPr lang="en-US" sz="4000" dirty="0"/>
           </a:p>
         </p:txBody>
       </p:sp>
@@ -9640,7 +9912,7 @@
                 <a:ea typeface="Calibri" pitchFamily="34" charset="-122"/>
                 <a:cs typeface="Calibri" pitchFamily="34" charset="-120"/>
               </a:rPr>
-              <a:t>3. TYPES OF RAINFALL</a:t>
+              <a:t>1. MEASUREMENT</a:t>
             </a:r>
             <a:endParaRPr lang="en-US" sz="1400" dirty="0"/>
           </a:p>
@@ -9705,7 +9977,7 @@
                 <a:ea typeface="Times New Roman" pitchFamily="34" charset="-122"/>
                 <a:cs typeface="Times New Roman" pitchFamily="34" charset="-120"/>
               </a:rPr>
-              <a:t>Activity 3: Question</a:t>
+              <a:t>Activity 2: Answer 2</a:t>
             </a:r>
             <a:endParaRPr lang="en-US" sz="3600" dirty="0"/>
           </a:p>
@@ -9747,7 +10019,7 @@
                 <a:ea typeface="Times New Roman" pitchFamily="34" charset="-122"/>
                 <a:cs typeface="Times New Roman" pitchFamily="34" charset="-120"/>
               </a:rPr>
-              <a:t>The hot ground heats the air, which rises and makes storms. What type of rain is this?</a:t>
+              <a:t>In millimetres (mm).</a:t>
             </a:r>
             <a:endParaRPr lang="en-US" sz="4000" dirty="0"/>
           </a:p>
@@ -9859,15 +10131,54 @@
                 <a:ea typeface="Calibri" pitchFamily="34" charset="-122"/>
                 <a:cs typeface="Calibri" pitchFamily="34" charset="-120"/>
               </a:rPr>
-              <a:t>3. TYPES OF RAINFALL</a:t>
+              <a:t>2. TYPES OF RAINFALL</a:t>
             </a:r>
             <a:endParaRPr lang="en-US" sz="1400" dirty="0"/>
+          </a:p>
+        </p:txBody>
+      </p:sp>
+      <p:sp>
+        <p:nvSpPr>
+          <p:cNvPr id="3" name="Text 1"/>
+          <p:cNvSpPr/>
+          <p:nvPr/>
+        </p:nvSpPr>
+        <p:spPr>
+          <a:xfrm>
+            <a:off x="457200" y="1005840"/>
+            <a:ext cx="11277295" cy="731520"/>
+          </a:xfrm>
+          <a:prstGeom prst="rect">
+            <a:avLst/>
+          </a:prstGeom>
+          <a:noFill/>
+          <a:ln/>
+        </p:spPr>
+        <p:txBody>
+          <a:bodyPr wrap="square" lIns="0" tIns="0" rIns="0" bIns="0" rtlCol="0" anchor="ctr"/>
+          <a:lstStyle/>
+          <a:p>
+            <a:pPr algn="ctr" indent="0" marL="0">
+              <a:buNone/>
+            </a:pPr>
+            <a:r>
+              <a:rPr lang="en-US" sz="3600" b="1" dirty="0">
+                <a:solidFill>
+                  <a:srgbClr val="990011"/>
+                </a:solidFill>
+                <a:latin typeface="Times New Roman" pitchFamily="34" charset="0"/>
+                <a:ea typeface="Times New Roman" pitchFamily="34" charset="-122"/>
+                <a:cs typeface="Times New Roman" pitchFamily="34" charset="-120"/>
+              </a:rPr>
+              <a:t>Activity 3</a:t>
+            </a:r>
+            <a:endParaRPr lang="en-US" sz="3600" dirty="0"/>
           </a:p>
         </p:txBody>
       </p:sp>
       <p:pic>
         <p:nvPicPr>
-          <p:cNvPr id="3" name="Image 0" descr="/home/claude/f4/img/minesec_sheet.png">    </p:cNvPr>
+          <p:cNvPr id="4" name="Image 0" descr="/home/claude/f4/img/v2/convection.gif">    </p:cNvPr>
           <p:cNvPicPr>
             <a:picLocks noChangeAspect="1"/>
           </p:cNvPicPr>
@@ -9881,8 +10192,8 @@
         </p:blipFill>
         <p:spPr>
           <a:xfrm>
-            <a:off x="0" y="658368"/>
-            <a:ext cx="5120640" cy="5833872"/>
+            <a:off x="629930" y="1783080"/>
+            <a:ext cx="10931835" cy="4270248"/>
           </a:xfrm>
           <a:prstGeom prst="rect">
             <a:avLst/>
@@ -9891,14 +10202,14 @@
       </p:pic>
       <p:sp>
         <p:nvSpPr>
-          <p:cNvPr id="4" name="Text 1"/>
+          <p:cNvPr id="5" name="Text 2"/>
           <p:cNvSpPr/>
           <p:nvPr/>
         </p:nvSpPr>
         <p:spPr>
           <a:xfrm>
-            <a:off x="5349240" y="1005840"/>
-            <a:ext cx="6522415" cy="731520"/>
+            <a:off x="457200" y="6089904"/>
+            <a:ext cx="11277295" cy="347472"/>
           </a:xfrm>
           <a:prstGeom prst="rect">
             <a:avLst/>
@@ -9907,68 +10218,24 @@
           <a:ln/>
         </p:spPr>
         <p:txBody>
-          <a:bodyPr wrap="square" lIns="0" tIns="0" rIns="0" bIns="0" rtlCol="0" anchor="ctr">
-            <a:normAutofit/>
-          </a:bodyPr>
+          <a:bodyPr wrap="square" lIns="0" tIns="0" rIns="0" bIns="0" rtlCol="0" anchor="ctr"/>
           <a:lstStyle/>
           <a:p>
             <a:pPr algn="ctr" indent="0" marL="0">
               <a:buNone/>
             </a:pPr>
             <a:r>
-              <a:rPr lang="en-US" sz="3600" b="1" dirty="0">
-                <a:solidFill>
-                  <a:srgbClr val="990011"/>
+              <a:rPr lang="en-US" sz="1800" i="1" dirty="0">
+                <a:solidFill>
+                  <a:srgbClr val="555555"/>
                 </a:solidFill>
                 <a:latin typeface="Times New Roman" pitchFamily="34" charset="0"/>
                 <a:ea typeface="Times New Roman" pitchFamily="34" charset="-122"/>
                 <a:cs typeface="Times New Roman" pitchFamily="34" charset="-120"/>
               </a:rPr>
-              <a:t>Activity 3: Answer</a:t>
-            </a:r>
-            <a:endParaRPr lang="en-US" sz="3600" dirty="0"/>
-          </a:p>
-        </p:txBody>
-      </p:sp>
-      <p:sp>
-        <p:nvSpPr>
-          <p:cNvPr id="5" name="Text 2"/>
-          <p:cNvSpPr/>
-          <p:nvPr/>
-        </p:nvSpPr>
-        <p:spPr>
-          <a:xfrm>
-            <a:off x="5349240" y="1783080"/>
-            <a:ext cx="6522415" cy="4663440"/>
-          </a:xfrm>
-          <a:prstGeom prst="rect">
-            <a:avLst/>
-          </a:prstGeom>
-          <a:noFill/>
-          <a:ln/>
-        </p:spPr>
-        <p:txBody>
-          <a:bodyPr wrap="square" lIns="0" tIns="0" rIns="0" bIns="0" rtlCol="0" anchor="t"/>
-          <a:lstStyle/>
-          <a:p>
-            <a:pPr algn="l" indent="0" marL="0">
-              <a:spcAft>
-                <a:spcPts val="800"/>
-              </a:spcAft>
-              <a:buNone/>
-            </a:pPr>
-            <a:r>
-              <a:rPr lang="en-US" sz="4000" dirty="0">
-                <a:solidFill>
-                  <a:srgbClr val="111111"/>
-                </a:solidFill>
-                <a:latin typeface="Times New Roman" pitchFamily="34" charset="0"/>
-                <a:ea typeface="Times New Roman" pitchFamily="34" charset="-122"/>
-                <a:cs typeface="Times New Roman" pitchFamily="34" charset="-120"/>
-              </a:rPr>
-              <a:t>Convectional rain.</a:t>
-            </a:r>
-            <a:endParaRPr lang="en-US" sz="4000" dirty="0"/>
+              <a:t>Animation: hot air rises.</a:t>
+            </a:r>
+            <a:endParaRPr lang="en-US" sz="1800" dirty="0"/>
           </a:p>
         </p:txBody>
       </p:sp>
@@ -10078,7 +10345,7 @@
                 <a:ea typeface="Calibri" pitchFamily="34" charset="-122"/>
                 <a:cs typeface="Calibri" pitchFamily="34" charset="-120"/>
               </a:rPr>
-              <a:t>BOARD SUMMARY</a:t>
+              <a:t>2. TYPES OF RAINFALL</a:t>
             </a:r>
             <a:endParaRPr lang="en-US" sz="1400" dirty="0"/>
           </a:p>
@@ -10143,7 +10410,7 @@
                 <a:ea typeface="Times New Roman" pitchFamily="34" charset="-122"/>
                 <a:cs typeface="Times New Roman" pitchFamily="34" charset="-120"/>
               </a:rPr>
-              <a:t>Board Summary</a:t>
+              <a:t>Activity 3: Question</a:t>
             </a:r>
             <a:endParaRPr lang="en-US" sz="3600" dirty="0"/>
           </a:p>
@@ -10177,7 +10444,7 @@
               <a:buNone/>
             </a:pPr>
             <a:r>
-              <a:rPr lang="en-US" sz="4000" b="1" dirty="0">
+              <a:rPr lang="en-US" sz="4000" dirty="0">
                 <a:solidFill>
                   <a:srgbClr val="111111"/>
                 </a:solidFill>
@@ -10185,47 +10452,7 @@
                 <a:ea typeface="Times New Roman" pitchFamily="34" charset="-122"/>
                 <a:cs typeface="Times New Roman" pitchFamily="34" charset="-120"/>
               </a:rPr>
-              <a:t>Topic: The Earth-Atmosphere System</a:t>
-            </a:r>
-            <a:endParaRPr lang="en-US" sz="4000" dirty="0"/>
-          </a:p>
-          <a:p>
-            <a:pPr algn="l" indent="0" marL="0">
-              <a:spcAft>
-                <a:spcPts val="800"/>
-              </a:spcAft>
-              <a:buNone/>
-            </a:pPr>
-            <a:r>
-              <a:rPr lang="en-US" sz="4000" b="1" dirty="0">
-                <a:solidFill>
-                  <a:srgbClr val="111111"/>
-                </a:solidFill>
-                <a:latin typeface="Times New Roman" pitchFamily="34" charset="0"/>
-                <a:ea typeface="Times New Roman" pitchFamily="34" charset="-122"/>
-                <a:cs typeface="Times New Roman" pitchFamily="34" charset="-120"/>
-              </a:rPr>
-              <a:t>Sub-topic: Forms of Condensation</a:t>
-            </a:r>
-            <a:endParaRPr lang="en-US" sz="4000" dirty="0"/>
-          </a:p>
-          <a:p>
-            <a:pPr algn="l" indent="0" marL="0">
-              <a:spcAft>
-                <a:spcPts val="800"/>
-              </a:spcAft>
-              <a:buNone/>
-            </a:pPr>
-            <a:r>
-              <a:rPr lang="en-US" sz="4000" b="1" dirty="0">
-                <a:solidFill>
-                  <a:srgbClr val="990011"/>
-                </a:solidFill>
-                <a:latin typeface="Times New Roman" pitchFamily="34" charset="0"/>
-                <a:ea typeface="Times New Roman" pitchFamily="34" charset="-122"/>
-                <a:cs typeface="Times New Roman" pitchFamily="34" charset="-120"/>
-              </a:rPr>
-              <a:t>Lesson 35: Precipitation</a:t>
+              <a:t>The hot ground heats the air, which rises and makes storms. What type of rain is this?</a:t>
             </a:r>
             <a:endParaRPr lang="en-US" sz="4000" dirty="0"/>
           </a:p>
@@ -10337,7 +10564,7 @@
                 <a:ea typeface="Calibri" pitchFamily="34" charset="-122"/>
                 <a:cs typeface="Calibri" pitchFamily="34" charset="-120"/>
               </a:rPr>
-              <a:t>BOARD SUMMARY</a:t>
+              <a:t>2. TYPES OF RAINFALL</a:t>
             </a:r>
             <a:endParaRPr lang="en-US" sz="1400" dirty="0"/>
           </a:p>
@@ -10360,7 +10587,7 @@
         <p:spPr>
           <a:xfrm>
             <a:off x="0" y="658368"/>
-            <a:ext cx="2468880" cy="5833872"/>
+            <a:ext cx="5120640" cy="5833872"/>
           </a:xfrm>
           <a:prstGeom prst="rect">
             <a:avLst/>
@@ -10375,8 +10602,8 @@
         </p:nvSpPr>
         <p:spPr>
           <a:xfrm>
-            <a:off x="2697480" y="1005840"/>
-            <a:ext cx="9174175" cy="731520"/>
+            <a:off x="5349240" y="1005840"/>
+            <a:ext cx="6522415" cy="731520"/>
           </a:xfrm>
           <a:prstGeom prst="rect">
             <a:avLst/>
@@ -10402,7 +10629,7 @@
                 <a:ea typeface="Times New Roman" pitchFamily="34" charset="-122"/>
                 <a:cs typeface="Times New Roman" pitchFamily="34" charset="-120"/>
               </a:rPr>
-              <a:t>1. Meaning and Forms of Precipitation</a:t>
+              <a:t>Activity 3: Answer</a:t>
             </a:r>
             <a:endParaRPr lang="en-US" sz="3600" dirty="0"/>
           </a:p>
@@ -10416,8 +10643,8 @@
         </p:nvSpPr>
         <p:spPr>
           <a:xfrm>
-            <a:off x="2697480" y="1783080"/>
-            <a:ext cx="9174175" cy="4663440"/>
+            <a:off x="5349240" y="1783080"/>
+            <a:ext cx="6522415" cy="4663440"/>
           </a:xfrm>
           <a:prstGeom prst="rect">
             <a:avLst/>
@@ -10436,7 +10663,7 @@
               <a:buNone/>
             </a:pPr>
             <a:r>
-              <a:rPr lang="en-US" sz="4000" i="1" dirty="0">
+              <a:rPr lang="en-US" sz="4000" dirty="0">
                 <a:solidFill>
                   <a:srgbClr val="111111"/>
                 </a:solidFill>
@@ -10444,81 +10671,7 @@
                 <a:ea typeface="Times New Roman" pitchFamily="34" charset="-122"/>
                 <a:cs typeface="Times New Roman" pitchFamily="34" charset="-120"/>
               </a:rPr>
-              <a:t>Precipitation is defined and takes the following forms:</a:t>
-            </a:r>
-            <a:endParaRPr lang="en-US" sz="4000" dirty="0"/>
-          </a:p>
-          <a:p>
-            <a:pPr algn="l" indent="0" marL="0">
-              <a:spcAft>
-                <a:spcPts val="800"/>
-              </a:spcAft>
-              <a:buNone/>
-            </a:pPr>
-            <a:r>
-              <a:rPr lang="en-US" sz="4000" b="1" dirty="0">
-                <a:solidFill>
-                  <a:srgbClr val="111111"/>
-                </a:solidFill>
-                <a:latin typeface="Times New Roman" pitchFamily="34" charset="0"/>
-                <a:ea typeface="Times New Roman" pitchFamily="34" charset="-122"/>
-                <a:cs typeface="Times New Roman" pitchFamily="34" charset="-120"/>
-              </a:rPr>
-              <a:t>Precipitation: </a:t>
-            </a:r>
-            <a:pPr algn="l" indent="0" marL="0">
-              <a:spcAft>
-                <a:spcPts val="800"/>
-              </a:spcAft>
-              <a:buNone/>
-            </a:pPr>
-            <a:r>
-              <a:rPr lang="en-US" sz="4000" dirty="0">
-                <a:solidFill>
-                  <a:srgbClr val="111111"/>
-                </a:solidFill>
-                <a:latin typeface="Times New Roman" pitchFamily="34" charset="0"/>
-                <a:ea typeface="Times New Roman" pitchFamily="34" charset="-122"/>
-                <a:cs typeface="Times New Roman" pitchFamily="34" charset="-120"/>
-              </a:rPr>
-              <a:t>It is any form of water that falls from clouds to the ground.</a:t>
-            </a:r>
-            <a:endParaRPr lang="en-US" sz="4000" dirty="0"/>
-          </a:p>
-          <a:p>
-            <a:pPr algn="l" indent="0" marL="0">
-              <a:spcAft>
-                <a:spcPts val="800"/>
-              </a:spcAft>
-              <a:buNone/>
-            </a:pPr>
-            <a:r>
-              <a:rPr lang="en-US" sz="4000" b="1" dirty="0">
-                <a:solidFill>
-                  <a:srgbClr val="111111"/>
-                </a:solidFill>
-                <a:latin typeface="Times New Roman" pitchFamily="34" charset="0"/>
-                <a:ea typeface="Times New Roman" pitchFamily="34" charset="-122"/>
-                <a:cs typeface="Times New Roman" pitchFamily="34" charset="-120"/>
-              </a:rPr>
-              <a:t>Rain and drizzle: </a:t>
-            </a:r>
-            <a:pPr algn="l" indent="0" marL="0">
-              <a:spcAft>
-                <a:spcPts val="800"/>
-              </a:spcAft>
-              <a:buNone/>
-            </a:pPr>
-            <a:r>
-              <a:rPr lang="en-US" sz="4000" dirty="0">
-                <a:solidFill>
-                  <a:srgbClr val="111111"/>
-                </a:solidFill>
-                <a:latin typeface="Times New Roman" pitchFamily="34" charset="0"/>
-                <a:ea typeface="Times New Roman" pitchFamily="34" charset="-122"/>
-                <a:cs typeface="Times New Roman" pitchFamily="34" charset="-120"/>
-              </a:rPr>
-              <a:t>Rain is drops of water, while drizzle is very small drops.</a:t>
+              <a:t>Convectional rain.</a:t>
             </a:r>
             <a:endParaRPr lang="en-US" sz="4000" dirty="0"/>
           </a:p>
@@ -10695,7 +10848,7 @@
                 <a:ea typeface="Times New Roman" pitchFamily="34" charset="-122"/>
                 <a:cs typeface="Times New Roman" pitchFamily="34" charset="-120"/>
               </a:rPr>
-              <a:t>1. Meaning and Forms of Precipitation (continued)</a:t>
+              <a:t>Board Summary</a:t>
             </a:r>
             <a:endParaRPr lang="en-US" sz="3600" dirty="0"/>
           </a:p>
@@ -10737,8 +10890,11 @@
                 <a:ea typeface="Times New Roman" pitchFamily="34" charset="-122"/>
                 <a:cs typeface="Times New Roman" pitchFamily="34" charset="-120"/>
               </a:rPr>
-              <a:t>Hail: </a:t>
-            </a:r>
+              <a:t>Topic: The Earth-Atmosphere System</a:t>
+            </a:r>
+            <a:endParaRPr lang="en-US" sz="4000" dirty="0"/>
+          </a:p>
+          <a:p>
             <a:pPr algn="l" indent="0" marL="0">
               <a:spcAft>
                 <a:spcPts val="800"/>
@@ -10746,7 +10902,7 @@
               <a:buNone/>
             </a:pPr>
             <a:r>
-              <a:rPr lang="en-US" sz="4000" dirty="0">
+              <a:rPr lang="en-US" sz="4000" b="1" dirty="0">
                 <a:solidFill>
                   <a:srgbClr val="111111"/>
                 </a:solidFill>
@@ -10754,7 +10910,7 @@
                 <a:ea typeface="Times New Roman" pitchFamily="34" charset="-122"/>
                 <a:cs typeface="Times New Roman" pitchFamily="34" charset="-120"/>
               </a:rPr>
-              <a:t>It is balls of ice that fall from cumulonimbus clouds.</a:t>
+              <a:t>Sub-topic: Forms of Condensation</a:t>
             </a:r>
             <a:endParaRPr lang="en-US" sz="4000" dirty="0"/>
           </a:p>
@@ -10768,30 +10924,13 @@
             <a:r>
               <a:rPr lang="en-US" sz="4000" b="1" dirty="0">
                 <a:solidFill>
-                  <a:srgbClr val="111111"/>
+                  <a:srgbClr val="990011"/>
                 </a:solidFill>
                 <a:latin typeface="Times New Roman" pitchFamily="34" charset="0"/>
                 <a:ea typeface="Times New Roman" pitchFamily="34" charset="-122"/>
                 <a:cs typeface="Times New Roman" pitchFamily="34" charset="-120"/>
               </a:rPr>
-              <a:t>Snow: </a:t>
-            </a:r>
-            <a:pPr algn="l" indent="0" marL="0">
-              <a:spcAft>
-                <a:spcPts val="800"/>
-              </a:spcAft>
-              <a:buNone/>
-            </a:pPr>
-            <a:r>
-              <a:rPr lang="en-US" sz="4000" dirty="0">
-                <a:solidFill>
-                  <a:srgbClr val="111111"/>
-                </a:solidFill>
-                <a:latin typeface="Times New Roman" pitchFamily="34" charset="0"/>
-                <a:ea typeface="Times New Roman" pitchFamily="34" charset="-122"/>
-                <a:cs typeface="Times New Roman" pitchFamily="34" charset="-120"/>
-              </a:rPr>
-              <a:t>It is ice crystals that fall when it is very cold.</a:t>
+              <a:t>Lesson 35: Precipitation</a:t>
             </a:r>
             <a:endParaRPr lang="en-US" sz="4000" dirty="0"/>
           </a:p>
@@ -11977,7 +12116,7 @@
                 <a:ea typeface="Times New Roman" pitchFamily="34" charset="-122"/>
                 <a:cs typeface="Times New Roman" pitchFamily="34" charset="-120"/>
               </a:rPr>
-              <a:t>2. Measurement of Rainfall</a:t>
+              <a:t>DEFINITIONS</a:t>
             </a:r>
             <a:endParaRPr lang="en-US" sz="3600" dirty="0"/>
           </a:p>
@@ -12019,7 +12158,7 @@
                 <a:ea typeface="Times New Roman" pitchFamily="34" charset="-122"/>
                 <a:cs typeface="Times New Roman" pitchFamily="34" charset="-120"/>
               </a:rPr>
-              <a:t>Rainfall is measured as follows:</a:t>
+              <a:t>The key terms of this lesson are defined as follows:</a:t>
             </a:r>
             <a:endParaRPr lang="en-US" sz="4000" dirty="0"/>
           </a:p>
@@ -12039,7 +12178,7 @@
                 <a:ea typeface="Times New Roman" pitchFamily="34" charset="-122"/>
                 <a:cs typeface="Times New Roman" pitchFamily="34" charset="-120"/>
               </a:rPr>
-              <a:t>Rain gauge: </a:t>
+              <a:t>Precipitation: </a:t>
             </a:r>
             <a:pPr algn="l" indent="0" marL="0">
               <a:spcAft>
@@ -12056,7 +12195,44 @@
                 <a:ea typeface="Times New Roman" pitchFamily="34" charset="-122"/>
                 <a:cs typeface="Times New Roman" pitchFamily="34" charset="-120"/>
               </a:rPr>
-              <a:t>It is the instrument that collects and measures rainfall in millimetres.</a:t>
+              <a:t>It is any form of water that falls from clouds to the ground.</a:t>
+            </a:r>
+            <a:endParaRPr lang="en-US" sz="4000" dirty="0"/>
+          </a:p>
+          <a:p>
+            <a:pPr algn="l" indent="0" marL="0">
+              <a:spcAft>
+                <a:spcPts val="800"/>
+              </a:spcAft>
+              <a:buNone/>
+            </a:pPr>
+            <a:r>
+              <a:rPr lang="en-US" sz="4000" b="1" dirty="0">
+                <a:solidFill>
+                  <a:srgbClr val="111111"/>
+                </a:solidFill>
+                <a:latin typeface="Times New Roman" pitchFamily="34" charset="0"/>
+                <a:ea typeface="Times New Roman" pitchFamily="34" charset="-122"/>
+                <a:cs typeface="Times New Roman" pitchFamily="34" charset="-120"/>
+              </a:rPr>
+              <a:t>Rain: </a:t>
+            </a:r>
+            <a:pPr algn="l" indent="0" marL="0">
+              <a:spcAft>
+                <a:spcPts val="800"/>
+              </a:spcAft>
+              <a:buNone/>
+            </a:pPr>
+            <a:r>
+              <a:rPr lang="en-US" sz="4000" dirty="0">
+                <a:solidFill>
+                  <a:srgbClr val="111111"/>
+                </a:solidFill>
+                <a:latin typeface="Times New Roman" pitchFamily="34" charset="0"/>
+                <a:ea typeface="Times New Roman" pitchFamily="34" charset="-122"/>
+                <a:cs typeface="Times New Roman" pitchFamily="34" charset="-120"/>
+              </a:rPr>
+              <a:t>It is drops of liquid water that fall from clouds.</a:t>
             </a:r>
             <a:endParaRPr lang="en-US" sz="4000" dirty="0"/>
           </a:p>
@@ -12191,7 +12367,7 @@
         <p:spPr>
           <a:xfrm>
             <a:off x="0" y="658368"/>
-            <a:ext cx="2468880" cy="5833872"/>
+            <a:ext cx="3840480" cy="5833872"/>
           </a:xfrm>
           <a:prstGeom prst="rect">
             <a:avLst/>
@@ -12206,8 +12382,8 @@
         </p:nvSpPr>
         <p:spPr>
           <a:xfrm>
-            <a:off x="2697480" y="1005840"/>
-            <a:ext cx="9174175" cy="731520"/>
+            <a:off x="4069080" y="1005840"/>
+            <a:ext cx="7802575" cy="731520"/>
           </a:xfrm>
           <a:prstGeom prst="rect">
             <a:avLst/>
@@ -12233,7 +12409,7 @@
                 <a:ea typeface="Times New Roman" pitchFamily="34" charset="-122"/>
                 <a:cs typeface="Times New Roman" pitchFamily="34" charset="-120"/>
               </a:rPr>
-              <a:t>3. Types of Rainfall</a:t>
+              <a:t>DEFINITIONS (continued)</a:t>
             </a:r>
             <a:endParaRPr lang="en-US" sz="3600" dirty="0"/>
           </a:p>
@@ -12247,8 +12423,8 @@
         </p:nvSpPr>
         <p:spPr>
           <a:xfrm>
-            <a:off x="2697480" y="1783080"/>
-            <a:ext cx="9174175" cy="4663440"/>
+            <a:off x="4069080" y="1783080"/>
+            <a:ext cx="7802575" cy="4663440"/>
           </a:xfrm>
           <a:prstGeom prst="rect">
             <a:avLst/>
@@ -12267,7 +12443,7 @@
               <a:buNone/>
             </a:pPr>
             <a:r>
-              <a:rPr lang="en-US" sz="4000" i="1" dirty="0">
+              <a:rPr lang="en-US" sz="4000" b="1" dirty="0">
                 <a:solidFill>
                   <a:srgbClr val="111111"/>
                 </a:solidFill>
@@ -12275,11 +12451,8 @@
                 <a:ea typeface="Times New Roman" pitchFamily="34" charset="-122"/>
                 <a:cs typeface="Times New Roman" pitchFamily="34" charset="-120"/>
               </a:rPr>
-              <a:t>There are three types of rainfall:</a:t>
-            </a:r>
-            <a:endParaRPr lang="en-US" sz="4000" dirty="0"/>
-          </a:p>
-          <a:p>
+              <a:t>Hail: </a:t>
+            </a:r>
             <a:pPr algn="l" indent="0" marL="0">
               <a:spcAft>
                 <a:spcPts val="800"/>
@@ -12287,7 +12460,7 @@
               <a:buNone/>
             </a:pPr>
             <a:r>
-              <a:rPr lang="en-US" sz="4000" b="1" dirty="0">
+              <a:rPr lang="en-US" sz="4000" dirty="0">
                 <a:solidFill>
                   <a:srgbClr val="111111"/>
                 </a:solidFill>
@@ -12295,8 +12468,11 @@
                 <a:ea typeface="Times New Roman" pitchFamily="34" charset="-122"/>
                 <a:cs typeface="Times New Roman" pitchFamily="34" charset="-120"/>
               </a:rPr>
-              <a:t>Convectional rainfall: </a:t>
-            </a:r>
+              <a:t>It is balls of ice that fall from cumulonimbus clouds.</a:t>
+            </a:r>
+            <a:endParaRPr lang="en-US" sz="4000" dirty="0"/>
+          </a:p>
+          <a:p>
             <a:pPr algn="l" indent="0" marL="0">
               <a:spcAft>
                 <a:spcPts val="800"/>
@@ -12304,7 +12480,7 @@
               <a:buNone/>
             </a:pPr>
             <a:r>
-              <a:rPr lang="en-US" sz="4000" dirty="0">
+              <a:rPr lang="en-US" sz="4000" b="1" dirty="0">
                 <a:solidFill>
                   <a:srgbClr val="111111"/>
                 </a:solidFill>
@@ -12312,11 +12488,8 @@
                 <a:ea typeface="Times New Roman" pitchFamily="34" charset="-122"/>
                 <a:cs typeface="Times New Roman" pitchFamily="34" charset="-120"/>
               </a:rPr>
-              <a:t>Hot ground heats the air, which rises, cools and gives heavy rain, as in Garoua.</a:t>
-            </a:r>
-            <a:endParaRPr lang="en-US" sz="4000" dirty="0"/>
-          </a:p>
-          <a:p>
+              <a:t>Snow: </a:t>
+            </a:r>
             <a:pPr algn="l" indent="0" marL="0">
               <a:spcAft>
                 <a:spcPts val="800"/>
@@ -12324,7 +12497,7 @@
               <a:buNone/>
             </a:pPr>
             <a:r>
-              <a:rPr lang="en-US" sz="4000" b="1" dirty="0">
+              <a:rPr lang="en-US" sz="4000" dirty="0">
                 <a:solidFill>
                   <a:srgbClr val="111111"/>
                 </a:solidFill>
@@ -12332,8 +12505,11 @@
                 <a:ea typeface="Times New Roman" pitchFamily="34" charset="-122"/>
                 <a:cs typeface="Times New Roman" pitchFamily="34" charset="-120"/>
               </a:rPr>
-              <a:t>Relief rainfall: </a:t>
-            </a:r>
+              <a:t>It is ice crystals that fall when the air is below 0 °C.</a:t>
+            </a:r>
+            <a:endParaRPr lang="en-US" sz="4000" dirty="0"/>
+          </a:p>
+          <a:p>
             <a:pPr algn="l" indent="0" marL="0">
               <a:spcAft>
                 <a:spcPts val="800"/>
@@ -12341,7 +12517,7 @@
               <a:buNone/>
             </a:pPr>
             <a:r>
-              <a:rPr lang="en-US" sz="4000" dirty="0">
+              <a:rPr lang="en-US" sz="4000" b="1" dirty="0">
                 <a:solidFill>
                   <a:srgbClr val="111111"/>
                 </a:solidFill>
@@ -12349,7 +12525,24 @@
                 <a:ea typeface="Times New Roman" pitchFamily="34" charset="-122"/>
                 <a:cs typeface="Times New Roman" pitchFamily="34" charset="-120"/>
               </a:rPr>
-              <a:t>Moist air is forced up a mountain, cools and gives rain on the windward side, as in Buea.</a:t>
+              <a:t>Drizzle: </a:t>
+            </a:r>
+            <a:pPr algn="l" indent="0" marL="0">
+              <a:spcAft>
+                <a:spcPts val="800"/>
+              </a:spcAft>
+              <a:buNone/>
+            </a:pPr>
+            <a:r>
+              <a:rPr lang="en-US" sz="4000" dirty="0">
+                <a:solidFill>
+                  <a:srgbClr val="111111"/>
+                </a:solidFill>
+                <a:latin typeface="Times New Roman" pitchFamily="34" charset="0"/>
+                <a:ea typeface="Times New Roman" pitchFamily="34" charset="-122"/>
+                <a:cs typeface="Times New Roman" pitchFamily="34" charset="-120"/>
+              </a:rPr>
+              <a:t>It is very small drops of rain that fall slowly.</a:t>
             </a:r>
             <a:endParaRPr lang="en-US" sz="4000" dirty="0"/>
           </a:p>
@@ -12467,9 +12660,129 @@
           </a:p>
         </p:txBody>
       </p:sp>
+      <p:sp>
+        <p:nvSpPr>
+          <p:cNvPr id="3" name="Text 1"/>
+          <p:cNvSpPr/>
+          <p:nvPr/>
+        </p:nvSpPr>
+        <p:spPr>
+          <a:xfrm>
+            <a:off x="365760" y="1005840"/>
+            <a:ext cx="11460175" cy="731520"/>
+          </a:xfrm>
+          <a:prstGeom prst="rect">
+            <a:avLst/>
+          </a:prstGeom>
+          <a:noFill/>
+          <a:ln/>
+        </p:spPr>
+        <p:txBody>
+          <a:bodyPr wrap="square" lIns="0" tIns="0" rIns="0" bIns="0" rtlCol="0" anchor="ctr">
+            <a:normAutofit/>
+          </a:bodyPr>
+          <a:lstStyle/>
+          <a:p>
+            <a:pPr algn="ctr" indent="0" marL="0">
+              <a:buNone/>
+            </a:pPr>
+            <a:r>
+              <a:rPr lang="en-US" sz="3600" b="1" dirty="0">
+                <a:solidFill>
+                  <a:srgbClr val="990011"/>
+                </a:solidFill>
+                <a:latin typeface="Times New Roman" pitchFamily="34" charset="0"/>
+                <a:ea typeface="Times New Roman" pitchFamily="34" charset="-122"/>
+                <a:cs typeface="Times New Roman" pitchFamily="34" charset="-120"/>
+              </a:rPr>
+              <a:t>1. Measurement of Rainfall</a:t>
+            </a:r>
+            <a:endParaRPr lang="en-US" sz="3600" dirty="0"/>
+          </a:p>
+        </p:txBody>
+      </p:sp>
+      <p:sp>
+        <p:nvSpPr>
+          <p:cNvPr id="4" name="Text 2"/>
+          <p:cNvSpPr/>
+          <p:nvPr/>
+        </p:nvSpPr>
+        <p:spPr>
+          <a:xfrm>
+            <a:off x="365760" y="1783080"/>
+            <a:ext cx="4846320" cy="4617720"/>
+          </a:xfrm>
+          <a:prstGeom prst="rect">
+            <a:avLst/>
+          </a:prstGeom>
+          <a:noFill/>
+          <a:ln/>
+        </p:spPr>
+        <p:txBody>
+          <a:bodyPr wrap="square" lIns="0" tIns="0" rIns="0" bIns="0" rtlCol="0" anchor="t"/>
+          <a:lstStyle/>
+          <a:p>
+            <a:pPr algn="l" indent="0" marL="0">
+              <a:spcAft>
+                <a:spcPts val="800"/>
+              </a:spcAft>
+              <a:buNone/>
+            </a:pPr>
+            <a:r>
+              <a:rPr lang="en-US" sz="3600" i="1" dirty="0">
+                <a:solidFill>
+                  <a:srgbClr val="111111"/>
+                </a:solidFill>
+                <a:latin typeface="Times New Roman" pitchFamily="34" charset="0"/>
+                <a:ea typeface="Times New Roman" pitchFamily="34" charset="-122"/>
+                <a:cs typeface="Times New Roman" pitchFamily="34" charset="-120"/>
+              </a:rPr>
+              <a:t>Rainfall is measured as follows:</a:t>
+            </a:r>
+            <a:endParaRPr lang="en-US" sz="3600" dirty="0"/>
+          </a:p>
+          <a:p>
+            <a:pPr algn="l" indent="0" marL="0">
+              <a:spcAft>
+                <a:spcPts val="800"/>
+              </a:spcAft>
+              <a:buNone/>
+            </a:pPr>
+            <a:r>
+              <a:rPr lang="en-US" sz="3600" b="1" dirty="0">
+                <a:solidFill>
+                  <a:srgbClr val="111111"/>
+                </a:solidFill>
+                <a:latin typeface="Times New Roman" pitchFamily="34" charset="0"/>
+                <a:ea typeface="Times New Roman" pitchFamily="34" charset="-122"/>
+                <a:cs typeface="Times New Roman" pitchFamily="34" charset="-120"/>
+              </a:rPr>
+              <a:t>Rain gauge (pluviometer): </a:t>
+            </a:r>
+            <a:pPr algn="l" indent="0" marL="0">
+              <a:spcAft>
+                <a:spcPts val="800"/>
+              </a:spcAft>
+              <a:buNone/>
+            </a:pPr>
+            <a:r>
+              <a:rPr lang="en-US" sz="3600" dirty="0">
+                <a:solidFill>
+                  <a:srgbClr val="111111"/>
+                </a:solidFill>
+                <a:latin typeface="Times New Roman" pitchFamily="34" charset="0"/>
+                <a:ea typeface="Times New Roman" pitchFamily="34" charset="-122"/>
+                <a:cs typeface="Times New Roman" pitchFamily="34" charset="-120"/>
+              </a:rPr>
+              <a:t>It collects rain in a funnel and a container placed in an open place.</a:t>
+            </a:r>
+            <a:endParaRPr lang="en-US" sz="3600" dirty="0"/>
+          </a:p>
+        </p:txBody>
+      </p:sp>
       <p:pic>
         <p:nvPicPr>
-          <p:cNvPr id="3" name="Image 0" descr="/home/claude/f4/img/minesec_sheet.png">    </p:cNvPr>
+          <p:cNvPr id="5" name="Image 0" descr="/home/claude/f4/img/v2/f4_raingauge.jpg">    </p:cNvPr>
           <p:cNvPicPr>
             <a:picLocks noChangeAspect="1"/>
           </p:cNvPicPr>
@@ -12483,8 +12796,8 @@
         </p:blipFill>
         <p:spPr>
           <a:xfrm>
-            <a:off x="0" y="658368"/>
-            <a:ext cx="5120640" cy="5833872"/>
+            <a:off x="5349240" y="2070315"/>
+            <a:ext cx="6659575" cy="3695777"/>
           </a:xfrm>
           <a:prstGeom prst="rect">
             <a:avLst/>
@@ -12493,14 +12806,14 @@
       </p:pic>
       <p:sp>
         <p:nvSpPr>
-          <p:cNvPr id="4" name="Text 1"/>
+          <p:cNvPr id="6" name="Text 3"/>
           <p:cNvSpPr/>
           <p:nvPr/>
         </p:nvSpPr>
         <p:spPr>
           <a:xfrm>
-            <a:off x="5349240" y="1005840"/>
-            <a:ext cx="6522415" cy="731520"/>
+            <a:off x="5349240" y="6089904"/>
+            <a:ext cx="6659575" cy="347472"/>
           </a:xfrm>
           <a:prstGeom prst="rect">
             <a:avLst/>
@@ -12509,85 +12822,24 @@
           <a:ln/>
         </p:spPr>
         <p:txBody>
-          <a:bodyPr wrap="square" lIns="0" tIns="0" rIns="0" bIns="0" rtlCol="0" anchor="ctr">
-            <a:normAutofit/>
-          </a:bodyPr>
+          <a:bodyPr wrap="square" lIns="0" tIns="0" rIns="0" bIns="0" rtlCol="0" anchor="ctr"/>
           <a:lstStyle/>
           <a:p>
             <a:pPr algn="ctr" indent="0" marL="0">
               <a:buNone/>
             </a:pPr>
             <a:r>
-              <a:rPr lang="en-US" sz="3600" b="1" dirty="0">
-                <a:solidFill>
-                  <a:srgbClr val="990011"/>
+              <a:rPr lang="en-US" sz="1600" i="1" dirty="0">
+                <a:solidFill>
+                  <a:srgbClr val="555555"/>
                 </a:solidFill>
                 <a:latin typeface="Times New Roman" pitchFamily="34" charset="0"/>
                 <a:ea typeface="Times New Roman" pitchFamily="34" charset="-122"/>
                 <a:cs typeface="Times New Roman" pitchFamily="34" charset="-120"/>
               </a:rPr>
-              <a:t>3. Types of Rainfall (continued)</a:t>
-            </a:r>
-            <a:endParaRPr lang="en-US" sz="3600" dirty="0"/>
-          </a:p>
-        </p:txBody>
-      </p:sp>
-      <p:sp>
-        <p:nvSpPr>
-          <p:cNvPr id="5" name="Text 2"/>
-          <p:cNvSpPr/>
-          <p:nvPr/>
-        </p:nvSpPr>
-        <p:spPr>
-          <a:xfrm>
-            <a:off x="5349240" y="1783080"/>
-            <a:ext cx="6522415" cy="4663440"/>
-          </a:xfrm>
-          <a:prstGeom prst="rect">
-            <a:avLst/>
-          </a:prstGeom>
-          <a:noFill/>
-          <a:ln/>
-        </p:spPr>
-        <p:txBody>
-          <a:bodyPr wrap="square" lIns="0" tIns="0" rIns="0" bIns="0" rtlCol="0" anchor="t"/>
-          <a:lstStyle/>
-          <a:p>
-            <a:pPr algn="l" indent="0" marL="0">
-              <a:spcAft>
-                <a:spcPts val="800"/>
-              </a:spcAft>
-              <a:buNone/>
-            </a:pPr>
-            <a:r>
-              <a:rPr lang="en-US" sz="4000" b="1" dirty="0">
-                <a:solidFill>
-                  <a:srgbClr val="111111"/>
-                </a:solidFill>
-                <a:latin typeface="Times New Roman" pitchFamily="34" charset="0"/>
-                <a:ea typeface="Times New Roman" pitchFamily="34" charset="-122"/>
-                <a:cs typeface="Times New Roman" pitchFamily="34" charset="-120"/>
-              </a:rPr>
-              <a:t>Frontal rainfall: </a:t>
-            </a:r>
-            <a:pPr algn="l" indent="0" marL="0">
-              <a:spcAft>
-                <a:spcPts val="800"/>
-              </a:spcAft>
-              <a:buNone/>
-            </a:pPr>
-            <a:r>
-              <a:rPr lang="en-US" sz="4000" dirty="0">
-                <a:solidFill>
-                  <a:srgbClr val="111111"/>
-                </a:solidFill>
-                <a:latin typeface="Times New Roman" pitchFamily="34" charset="0"/>
-                <a:ea typeface="Times New Roman" pitchFamily="34" charset="-122"/>
-                <a:cs typeface="Times New Roman" pitchFamily="34" charset="-120"/>
-              </a:rPr>
-              <a:t>Warm air rises over cold air and gives rain, as in Europe.</a:t>
-            </a:r>
-            <a:endParaRPr lang="en-US" sz="4000" dirty="0"/>
+              <a:t>Illustration: a rain gauge</a:t>
+            </a:r>
+            <a:endParaRPr lang="en-US" sz="1600" dirty="0"/>
           </a:p>
         </p:txBody>
       </p:sp>
@@ -12703,48 +12955,9 @@
           </a:p>
         </p:txBody>
       </p:sp>
-      <p:sp>
-        <p:nvSpPr>
-          <p:cNvPr id="3" name="Text 1"/>
-          <p:cNvSpPr/>
-          <p:nvPr/>
-        </p:nvSpPr>
-        <p:spPr>
-          <a:xfrm>
-            <a:off x="457200" y="1005840"/>
-            <a:ext cx="11277295" cy="731520"/>
-          </a:xfrm>
-          <a:prstGeom prst="rect">
-            <a:avLst/>
-          </a:prstGeom>
-          <a:noFill/>
-          <a:ln/>
-        </p:spPr>
-        <p:txBody>
-          <a:bodyPr wrap="square" lIns="0" tIns="0" rIns="0" bIns="0" rtlCol="0" anchor="ctr"/>
-          <a:lstStyle/>
-          <a:p>
-            <a:pPr algn="ctr" indent="0" marL="0">
-              <a:buNone/>
-            </a:pPr>
-            <a:r>
-              <a:rPr lang="en-US" sz="3600" b="1" dirty="0">
-                <a:solidFill>
-                  <a:srgbClr val="990011"/>
-                </a:solidFill>
-                <a:latin typeface="Times New Roman" pitchFamily="34" charset="0"/>
-                <a:ea typeface="Times New Roman" pitchFamily="34" charset="-122"/>
-                <a:cs typeface="Times New Roman" pitchFamily="34" charset="-120"/>
-              </a:rPr>
-              <a:t>3. Types of Rainfall</a:t>
-            </a:r>
-            <a:endParaRPr lang="en-US" sz="3600" dirty="0"/>
-          </a:p>
-        </p:txBody>
-      </p:sp>
       <p:pic>
         <p:nvPicPr>
-          <p:cNvPr id="4" name="Image 0" descr="/home/claude/f4/img/v2/rainfall_types_big.png">    </p:cNvPr>
+          <p:cNvPr id="3" name="Image 0" descr="/home/claude/f4/img/minesec_sheet.png">    </p:cNvPr>
           <p:cNvPicPr>
             <a:picLocks noChangeAspect="1"/>
           </p:cNvPicPr>
@@ -12758,8 +12971,8 @@
         </p:blipFill>
         <p:spPr>
           <a:xfrm>
-            <a:off x="629930" y="1783080"/>
-            <a:ext cx="10931835" cy="4270248"/>
+            <a:off x="0" y="658368"/>
+            <a:ext cx="5120640" cy="5833872"/>
           </a:xfrm>
           <a:prstGeom prst="rect">
             <a:avLst/>
@@ -12768,14 +12981,14 @@
       </p:pic>
       <p:sp>
         <p:nvSpPr>
-          <p:cNvPr id="5" name="Text 2"/>
+          <p:cNvPr id="4" name="Text 1"/>
           <p:cNvSpPr/>
           <p:nvPr/>
         </p:nvSpPr>
         <p:spPr>
           <a:xfrm>
-            <a:off x="457200" y="6089904"/>
-            <a:ext cx="11277295" cy="347472"/>
+            <a:off x="5349240" y="1005840"/>
+            <a:ext cx="6522415" cy="731520"/>
           </a:xfrm>
           <a:prstGeom prst="rect">
             <a:avLst/>
@@ -12784,24 +12997,122 @@
           <a:ln/>
         </p:spPr>
         <p:txBody>
-          <a:bodyPr wrap="square" lIns="0" tIns="0" rIns="0" bIns="0" rtlCol="0" anchor="ctr"/>
+          <a:bodyPr wrap="square" lIns="0" tIns="0" rIns="0" bIns="0" rtlCol="0" anchor="ctr">
+            <a:normAutofit/>
+          </a:bodyPr>
           <a:lstStyle/>
           <a:p>
             <a:pPr algn="ctr" indent="0" marL="0">
               <a:buNone/>
             </a:pPr>
             <a:r>
-              <a:rPr lang="en-US" sz="1800" i="1" dirty="0">
-                <a:solidFill>
-                  <a:srgbClr val="555555"/>
+              <a:rPr lang="en-US" sz="3600" b="1" dirty="0">
+                <a:solidFill>
+                  <a:srgbClr val="990011"/>
                 </a:solidFill>
                 <a:latin typeface="Times New Roman" pitchFamily="34" charset="0"/>
                 <a:ea typeface="Times New Roman" pitchFamily="34" charset="-122"/>
                 <a:cs typeface="Times New Roman" pitchFamily="34" charset="-120"/>
               </a:rPr>
-              <a:t>Illustration: types of rainfall</a:t>
-            </a:r>
-            <a:endParaRPr lang="en-US" sz="1800" dirty="0"/>
+              <a:t>1. Measurement of Rainfall</a:t>
+            </a:r>
+            <a:endParaRPr lang="en-US" sz="3600" dirty="0"/>
+          </a:p>
+        </p:txBody>
+      </p:sp>
+      <p:sp>
+        <p:nvSpPr>
+          <p:cNvPr id="5" name="Text 2"/>
+          <p:cNvSpPr/>
+          <p:nvPr/>
+        </p:nvSpPr>
+        <p:spPr>
+          <a:xfrm>
+            <a:off x="5349240" y="1783080"/>
+            <a:ext cx="6522415" cy="4663440"/>
+          </a:xfrm>
+          <a:prstGeom prst="rect">
+            <a:avLst/>
+          </a:prstGeom>
+          <a:noFill/>
+          <a:ln/>
+        </p:spPr>
+        <p:txBody>
+          <a:bodyPr wrap="square" lIns="0" tIns="0" rIns="0" bIns="0" rtlCol="0" anchor="t"/>
+          <a:lstStyle/>
+          <a:p>
+            <a:pPr algn="l" indent="0" marL="0">
+              <a:spcAft>
+                <a:spcPts val="800"/>
+              </a:spcAft>
+              <a:buNone/>
+            </a:pPr>
+            <a:r>
+              <a:rPr lang="en-US" sz="4000" b="1" dirty="0">
+                <a:solidFill>
+                  <a:srgbClr val="111111"/>
+                </a:solidFill>
+                <a:latin typeface="Times New Roman" pitchFamily="34" charset="0"/>
+                <a:ea typeface="Times New Roman" pitchFamily="34" charset="-122"/>
+                <a:cs typeface="Times New Roman" pitchFamily="34" charset="-120"/>
+              </a:rPr>
+              <a:t>Reading: </a:t>
+            </a:r>
+            <a:pPr algn="l" indent="0" marL="0">
+              <a:spcAft>
+                <a:spcPts val="800"/>
+              </a:spcAft>
+              <a:buNone/>
+            </a:pPr>
+            <a:r>
+              <a:rPr lang="en-US" sz="4000" dirty="0">
+                <a:solidFill>
+                  <a:srgbClr val="111111"/>
+                </a:solidFill>
+                <a:latin typeface="Times New Roman" pitchFamily="34" charset="0"/>
+                <a:ea typeface="Times New Roman" pitchFamily="34" charset="-122"/>
+                <a:cs typeface="Times New Roman" pitchFamily="34" charset="-120"/>
+              </a:rPr>
+              <a:t>The water is poured into a measuring cylinder and read in millimetres every day.</a:t>
+            </a:r>
+            <a:endParaRPr lang="en-US" sz="4000" dirty="0"/>
+          </a:p>
+          <a:p>
+            <a:pPr algn="l" indent="0" marL="0">
+              <a:spcAft>
+                <a:spcPts val="800"/>
+              </a:spcAft>
+              <a:buNone/>
+            </a:pPr>
+            <a:r>
+              <a:rPr lang="en-US" sz="4000" b="1" dirty="0">
+                <a:solidFill>
+                  <a:srgbClr val="111111"/>
+                </a:solidFill>
+                <a:latin typeface="Times New Roman" pitchFamily="34" charset="0"/>
+                <a:ea typeface="Times New Roman" pitchFamily="34" charset="-122"/>
+                <a:cs typeface="Times New Roman" pitchFamily="34" charset="-120"/>
+              </a:rPr>
+              <a:t>Siting: </a:t>
+            </a:r>
+            <a:pPr algn="l" indent="0" marL="0">
+              <a:spcAft>
+                <a:spcPts val="800"/>
+              </a:spcAft>
+              <a:buNone/>
+            </a:pPr>
+            <a:r>
+              <a:rPr lang="en-US" sz="4000" dirty="0">
+                <a:solidFill>
+                  <a:srgbClr val="111111"/>
+                </a:solidFill>
+                <a:latin typeface="Times New Roman" pitchFamily="34" charset="0"/>
+                <a:ea typeface="Times New Roman" pitchFamily="34" charset="-122"/>
+                <a:cs typeface="Times New Roman" pitchFamily="34" charset="-120"/>
+              </a:rPr>
+              <a:t>The rim stands about 30 cm above the ground, away from trees and buildings.</a:t>
+            </a:r>
+            <a:endParaRPr lang="en-US" sz="4000" dirty="0"/>
           </a:p>
         </p:txBody>
       </p:sp>
@@ -12911,7 +13222,7 @@
                 <a:ea typeface="Calibri" pitchFamily="34" charset="-122"/>
                 <a:cs typeface="Calibri" pitchFamily="34" charset="-120"/>
               </a:rPr>
-              <a:t>FORMATIVE EVALUATION</a:t>
+              <a:t>BOARD SUMMARY</a:t>
             </a:r>
             <a:endParaRPr lang="en-US" sz="1400" dirty="0"/>
           </a:p>
@@ -12976,7 +13287,7 @@
                 <a:ea typeface="Times New Roman" pitchFamily="34" charset="-122"/>
                 <a:cs typeface="Times New Roman" pitchFamily="34" charset="-120"/>
               </a:rPr>
-              <a:t>Evaluation 1</a:t>
+              <a:t>1. Measurement of Rainfall (continued)</a:t>
             </a:r>
             <a:endParaRPr lang="en-US" sz="3600" dirty="0"/>
           </a:p>
@@ -13010,7 +13321,7 @@
               <a:buNone/>
             </a:pPr>
             <a:r>
-              <a:rPr lang="en-US" sz="4000" dirty="0">
+              <a:rPr lang="en-US" sz="4000" b="1" dirty="0">
                 <a:solidFill>
                   <a:srgbClr val="111111"/>
                 </a:solidFill>
@@ -13018,7 +13329,24 @@
                 <a:ea typeface="Times New Roman" pitchFamily="34" charset="-122"/>
                 <a:cs typeface="Times New Roman" pitchFamily="34" charset="-120"/>
               </a:rPr>
-              <a:t>Which instrument measures rainfall?</a:t>
+              <a:t>Presentation: </a:t>
+            </a:r>
+            <a:pPr algn="l" indent="0" marL="0">
+              <a:spcAft>
+                <a:spcPts val="800"/>
+              </a:spcAft>
+              <a:buNone/>
+            </a:pPr>
+            <a:r>
+              <a:rPr lang="en-US" sz="4000" dirty="0">
+                <a:solidFill>
+                  <a:srgbClr val="111111"/>
+                </a:solidFill>
+                <a:latin typeface="Times New Roman" pitchFamily="34" charset="0"/>
+                <a:ea typeface="Times New Roman" pitchFamily="34" charset="-122"/>
+                <a:cs typeface="Times New Roman" pitchFamily="34" charset="-120"/>
+              </a:rPr>
+              <a:t>Daily rainfall is added to get monthly and annual totals, shown on bar graphs and maps with isohyets.</a:t>
             </a:r>
             <a:endParaRPr lang="en-US" sz="4000" dirty="0"/>
           </a:p>
@@ -13130,15 +13458,135 @@
                 <a:ea typeface="Calibri" pitchFamily="34" charset="-122"/>
                 <a:cs typeface="Calibri" pitchFamily="34" charset="-120"/>
               </a:rPr>
-              <a:t>FORMATIVE EVALUATION</a:t>
+              <a:t>BOARD SUMMARY</a:t>
             </a:r>
             <a:endParaRPr lang="en-US" sz="1400" dirty="0"/>
+          </a:p>
+        </p:txBody>
+      </p:sp>
+      <p:sp>
+        <p:nvSpPr>
+          <p:cNvPr id="3" name="Text 1"/>
+          <p:cNvSpPr/>
+          <p:nvPr/>
+        </p:nvSpPr>
+        <p:spPr>
+          <a:xfrm>
+            <a:off x="365760" y="1005840"/>
+            <a:ext cx="11460175" cy="731520"/>
+          </a:xfrm>
+          <a:prstGeom prst="rect">
+            <a:avLst/>
+          </a:prstGeom>
+          <a:noFill/>
+          <a:ln/>
+        </p:spPr>
+        <p:txBody>
+          <a:bodyPr wrap="square" lIns="0" tIns="0" rIns="0" bIns="0" rtlCol="0" anchor="ctr">
+            <a:normAutofit/>
+          </a:bodyPr>
+          <a:lstStyle/>
+          <a:p>
+            <a:pPr algn="ctr" indent="0" marL="0">
+              <a:buNone/>
+            </a:pPr>
+            <a:r>
+              <a:rPr lang="en-US" sz="3600" b="1" dirty="0">
+                <a:solidFill>
+                  <a:srgbClr val="990011"/>
+                </a:solidFill>
+                <a:latin typeface="Times New Roman" pitchFamily="34" charset="0"/>
+                <a:ea typeface="Times New Roman" pitchFamily="34" charset="-122"/>
+                <a:cs typeface="Times New Roman" pitchFamily="34" charset="-120"/>
+              </a:rPr>
+              <a:t>2. Types of Rainfall</a:t>
+            </a:r>
+            <a:endParaRPr lang="en-US" sz="3600" dirty="0"/>
+          </a:p>
+        </p:txBody>
+      </p:sp>
+      <p:sp>
+        <p:nvSpPr>
+          <p:cNvPr id="4" name="Text 2"/>
+          <p:cNvSpPr/>
+          <p:nvPr/>
+        </p:nvSpPr>
+        <p:spPr>
+          <a:xfrm>
+            <a:off x="365760" y="1783080"/>
+            <a:ext cx="4846320" cy="4617720"/>
+          </a:xfrm>
+          <a:prstGeom prst="rect">
+            <a:avLst/>
+          </a:prstGeom>
+          <a:noFill/>
+          <a:ln/>
+        </p:spPr>
+        <p:txBody>
+          <a:bodyPr wrap="square" lIns="0" tIns="0" rIns="0" bIns="0" rtlCol="0" anchor="t"/>
+          <a:lstStyle/>
+          <a:p>
+            <a:pPr algn="l" indent="0" marL="0">
+              <a:spcAft>
+                <a:spcPts val="800"/>
+              </a:spcAft>
+              <a:buNone/>
+            </a:pPr>
+            <a:r>
+              <a:rPr lang="en-US" sz="3200" i="1" dirty="0">
+                <a:solidFill>
+                  <a:srgbClr val="111111"/>
+                </a:solidFill>
+                <a:latin typeface="Times New Roman" pitchFamily="34" charset="0"/>
+                <a:ea typeface="Times New Roman" pitchFamily="34" charset="-122"/>
+                <a:cs typeface="Times New Roman" pitchFamily="34" charset="-120"/>
+              </a:rPr>
+              <a:t>There are three types of rainfall:</a:t>
+            </a:r>
+            <a:endParaRPr lang="en-US" sz="3200" dirty="0"/>
+          </a:p>
+          <a:p>
+            <a:pPr algn="l" indent="0" marL="0">
+              <a:spcAft>
+                <a:spcPts val="800"/>
+              </a:spcAft>
+              <a:buNone/>
+            </a:pPr>
+            <a:r>
+              <a:rPr lang="en-US" sz="3200" b="1" dirty="0">
+                <a:solidFill>
+                  <a:srgbClr val="111111"/>
+                </a:solidFill>
+                <a:latin typeface="Times New Roman" pitchFamily="34" charset="0"/>
+                <a:ea typeface="Times New Roman" pitchFamily="34" charset="-122"/>
+                <a:cs typeface="Times New Roman" pitchFamily="34" charset="-120"/>
+              </a:rPr>
+              <a:t>Convectional rainfall: </a:t>
+            </a:r>
+            <a:pPr algn="l" indent="0" marL="0">
+              <a:spcAft>
+                <a:spcPts val="800"/>
+              </a:spcAft>
+              <a:buNone/>
+            </a:pPr>
+            <a:r>
+              <a:rPr lang="en-US" sz="3200" dirty="0">
+                <a:solidFill>
+                  <a:srgbClr val="111111"/>
+                </a:solidFill>
+                <a:latin typeface="Times New Roman" pitchFamily="34" charset="0"/>
+                <a:ea typeface="Times New Roman" pitchFamily="34" charset="-122"/>
+                <a:cs typeface="Times New Roman" pitchFamily="34" charset="-120"/>
+              </a:rPr>
+              <a:t>The hot ground heats the air, which rises, cools and forms cumulonimbus clouds that give heavy afternoon storms, as in Garoua.</a:t>
+            </a:r>
+            <a:endParaRPr lang="en-US" sz="3200" dirty="0"/>
           </a:p>
         </p:txBody>
       </p:sp>
       <p:pic>
         <p:nvPicPr>
-          <p:cNvPr id="3" name="Image 0" descr="/home/claude/f4/img/minesec_sheet.png">    </p:cNvPr>
+          <p:cNvPr id="5" name="Image 0" descr="/home/claude/f4/img/v2/rainfall_types_big.png">    </p:cNvPr>
           <p:cNvPicPr>
             <a:picLocks noChangeAspect="1"/>
           </p:cNvPicPr>
@@ -13152,8 +13600,8 @@
         </p:blipFill>
         <p:spPr>
           <a:xfrm>
-            <a:off x="0" y="658368"/>
-            <a:ext cx="5120640" cy="5833872"/>
+            <a:off x="5349240" y="2617506"/>
+            <a:ext cx="6659575" cy="2601397"/>
           </a:xfrm>
           <a:prstGeom prst="rect">
             <a:avLst/>
@@ -13162,14 +13610,14 @@
       </p:pic>
       <p:sp>
         <p:nvSpPr>
-          <p:cNvPr id="4" name="Text 1"/>
+          <p:cNvPr id="6" name="Text 3"/>
           <p:cNvSpPr/>
           <p:nvPr/>
         </p:nvSpPr>
         <p:spPr>
           <a:xfrm>
-            <a:off x="5349240" y="1005840"/>
-            <a:ext cx="6522415" cy="731520"/>
+            <a:off x="5349240" y="6089904"/>
+            <a:ext cx="6659575" cy="347472"/>
           </a:xfrm>
           <a:prstGeom prst="rect">
             <a:avLst/>
@@ -13178,68 +13626,24 @@
           <a:ln/>
         </p:spPr>
         <p:txBody>
-          <a:bodyPr wrap="square" lIns="0" tIns="0" rIns="0" bIns="0" rtlCol="0" anchor="ctr">
-            <a:normAutofit/>
-          </a:bodyPr>
+          <a:bodyPr wrap="square" lIns="0" tIns="0" rIns="0" bIns="0" rtlCol="0" anchor="ctr"/>
           <a:lstStyle/>
           <a:p>
             <a:pPr algn="ctr" indent="0" marL="0">
               <a:buNone/>
             </a:pPr>
             <a:r>
-              <a:rPr lang="en-US" sz="3600" b="1" dirty="0">
-                <a:solidFill>
-                  <a:srgbClr val="990011"/>
+              <a:rPr lang="en-US" sz="1600" i="1" dirty="0">
+                <a:solidFill>
+                  <a:srgbClr val="555555"/>
                 </a:solidFill>
                 <a:latin typeface="Times New Roman" pitchFamily="34" charset="0"/>
                 <a:ea typeface="Times New Roman" pitchFamily="34" charset="-122"/>
                 <a:cs typeface="Times New Roman" pitchFamily="34" charset="-120"/>
               </a:rPr>
-              <a:t>Expected Answer</a:t>
-            </a:r>
-            <a:endParaRPr lang="en-US" sz="3600" dirty="0"/>
-          </a:p>
-        </p:txBody>
-      </p:sp>
-      <p:sp>
-        <p:nvSpPr>
-          <p:cNvPr id="5" name="Text 2"/>
-          <p:cNvSpPr/>
-          <p:nvPr/>
-        </p:nvSpPr>
-        <p:spPr>
-          <a:xfrm>
-            <a:off x="5349240" y="1783080"/>
-            <a:ext cx="6522415" cy="4663440"/>
-          </a:xfrm>
-          <a:prstGeom prst="rect">
-            <a:avLst/>
-          </a:prstGeom>
-          <a:noFill/>
-          <a:ln/>
-        </p:spPr>
-        <p:txBody>
-          <a:bodyPr wrap="square" lIns="0" tIns="0" rIns="0" bIns="0" rtlCol="0" anchor="t"/>
-          <a:lstStyle/>
-          <a:p>
-            <a:pPr algn="l" indent="0" marL="0">
-              <a:spcAft>
-                <a:spcPts val="800"/>
-              </a:spcAft>
-              <a:buNone/>
-            </a:pPr>
-            <a:r>
-              <a:rPr lang="en-US" sz="4000" dirty="0">
-                <a:solidFill>
-                  <a:srgbClr val="111111"/>
-                </a:solidFill>
-                <a:latin typeface="Times New Roman" pitchFamily="34" charset="0"/>
-                <a:ea typeface="Times New Roman" pitchFamily="34" charset="-122"/>
-                <a:cs typeface="Times New Roman" pitchFamily="34" charset="-120"/>
-              </a:rPr>
-              <a:t>The rain gauge.</a:t>
-            </a:r>
-            <a:endParaRPr lang="en-US" sz="4000" dirty="0"/>
+              <a:t>Illustration: types of rainfall</a:t>
+            </a:r>
+            <a:endParaRPr lang="en-US" sz="1600" dirty="0"/>
           </a:p>
         </p:txBody>
       </p:sp>
@@ -13349,7 +13753,7 @@
                 <a:ea typeface="Calibri" pitchFamily="34" charset="-122"/>
                 <a:cs typeface="Calibri" pitchFamily="34" charset="-120"/>
               </a:rPr>
-              <a:t>FORMATIVE EVALUATION</a:t>
+              <a:t>BOARD SUMMARY</a:t>
             </a:r>
             <a:endParaRPr lang="en-US" sz="1400" dirty="0"/>
           </a:p>
@@ -13372,7 +13776,7 @@
         <p:spPr>
           <a:xfrm>
             <a:off x="0" y="658368"/>
-            <a:ext cx="5120640" cy="5833872"/>
+            <a:ext cx="2468880" cy="5833872"/>
           </a:xfrm>
           <a:prstGeom prst="rect">
             <a:avLst/>
@@ -13387,8 +13791,8 @@
         </p:nvSpPr>
         <p:spPr>
           <a:xfrm>
-            <a:off x="5349240" y="1005840"/>
-            <a:ext cx="6522415" cy="731520"/>
+            <a:off x="2697480" y="1005840"/>
+            <a:ext cx="9174175" cy="731520"/>
           </a:xfrm>
           <a:prstGeom prst="rect">
             <a:avLst/>
@@ -13414,7 +13818,7 @@
                 <a:ea typeface="Times New Roman" pitchFamily="34" charset="-122"/>
                 <a:cs typeface="Times New Roman" pitchFamily="34" charset="-120"/>
               </a:rPr>
-              <a:t>Evaluation 2</a:t>
+              <a:t>2. Types of Rainfall</a:t>
             </a:r>
             <a:endParaRPr lang="en-US" sz="3600" dirty="0"/>
           </a:p>
@@ -13428,8 +13832,8 @@
         </p:nvSpPr>
         <p:spPr>
           <a:xfrm>
-            <a:off x="5349240" y="1783080"/>
-            <a:ext cx="6522415" cy="4663440"/>
+            <a:off x="2697480" y="1783080"/>
+            <a:ext cx="9174175" cy="4663440"/>
           </a:xfrm>
           <a:prstGeom prst="rect">
             <a:avLst/>
@@ -13448,7 +13852,7 @@
               <a:buNone/>
             </a:pPr>
             <a:r>
-              <a:rPr lang="en-US" sz="4000" dirty="0">
+              <a:rPr lang="en-US" sz="4000" b="1" dirty="0">
                 <a:solidFill>
                   <a:srgbClr val="111111"/>
                 </a:solidFill>
@@ -13456,7 +13860,61 @@
                 <a:ea typeface="Times New Roman" pitchFamily="34" charset="-122"/>
                 <a:cs typeface="Times New Roman" pitchFamily="34" charset="-120"/>
               </a:rPr>
-              <a:t>Why does Buea receive a lot of rain?</a:t>
+              <a:t>Relief (orographic) rainfall: </a:t>
+            </a:r>
+            <a:pPr algn="l" indent="0" marL="0">
+              <a:spcAft>
+                <a:spcPts val="800"/>
+              </a:spcAft>
+              <a:buNone/>
+            </a:pPr>
+            <a:r>
+              <a:rPr lang="en-US" sz="4000" dirty="0">
+                <a:solidFill>
+                  <a:srgbClr val="111111"/>
+                </a:solidFill>
+                <a:latin typeface="Times New Roman" pitchFamily="34" charset="0"/>
+                <a:ea typeface="Times New Roman" pitchFamily="34" charset="-122"/>
+                <a:cs typeface="Times New Roman" pitchFamily="34" charset="-120"/>
+              </a:rPr>
+              <a:t>Moist air is forced up a mountain, cools and gives rain on the windward side, as in Buea and Debundscha.</a:t>
+            </a:r>
+            <a:endParaRPr lang="en-US" sz="4000" dirty="0"/>
+          </a:p>
+          <a:p>
+            <a:pPr algn="l" indent="0" marL="0">
+              <a:spcAft>
+                <a:spcPts val="800"/>
+              </a:spcAft>
+              <a:buNone/>
+            </a:pPr>
+            <a:r>
+              <a:rPr lang="en-US" sz="4000" b="1" dirty="0">
+                <a:solidFill>
+                  <a:srgbClr val="111111"/>
+                </a:solidFill>
+                <a:latin typeface="Times New Roman" pitchFamily="34" charset="0"/>
+                <a:ea typeface="Times New Roman" pitchFamily="34" charset="-122"/>
+                <a:cs typeface="Times New Roman" pitchFamily="34" charset="-120"/>
+              </a:rPr>
+              <a:t>Frontal (cyclonic) rainfall: </a:t>
+            </a:r>
+            <a:pPr algn="l" indent="0" marL="0">
+              <a:spcAft>
+                <a:spcPts val="800"/>
+              </a:spcAft>
+              <a:buNone/>
+            </a:pPr>
+            <a:r>
+              <a:rPr lang="en-US" sz="4000" dirty="0">
+                <a:solidFill>
+                  <a:srgbClr val="111111"/>
+                </a:solidFill>
+                <a:latin typeface="Times New Roman" pitchFamily="34" charset="0"/>
+                <a:ea typeface="Times New Roman" pitchFamily="34" charset="-122"/>
+                <a:cs typeface="Times New Roman" pitchFamily="34" charset="-120"/>
+              </a:rPr>
+              <a:t>Warm, moist air rises over cold air, cools and gives long, steady rain, as in Europe.</a:t>
             </a:r>
             <a:endParaRPr lang="en-US" sz="4000" dirty="0"/>
           </a:p>
@@ -13633,7 +14091,7 @@
                 <a:ea typeface="Times New Roman" pitchFamily="34" charset="-122"/>
                 <a:cs typeface="Times New Roman" pitchFamily="34" charset="-120"/>
               </a:rPr>
-              <a:t>Expected Answer</a:t>
+              <a:t>Evaluation 1</a:t>
             </a:r>
             <a:endParaRPr lang="en-US" sz="3600" dirty="0"/>
           </a:p>
@@ -13675,7 +14133,7 @@
                 <a:ea typeface="Times New Roman" pitchFamily="34" charset="-122"/>
                 <a:cs typeface="Times New Roman" pitchFamily="34" charset="-120"/>
               </a:rPr>
-              <a:t>Mount Cameroon forces wet air to rise (relief rain).</a:t>
+              <a:t>Which instrument measures rainfall?</a:t>
             </a:r>
             <a:endParaRPr lang="en-US" sz="4000" dirty="0"/>
           </a:p>
@@ -13787,7 +14245,7 @@
                 <a:ea typeface="Calibri" pitchFamily="34" charset="-122"/>
                 <a:cs typeface="Calibri" pitchFamily="34" charset="-120"/>
               </a:rPr>
-              <a:t>REMEDIATION</a:t>
+              <a:t>FORMATIVE EVALUATION</a:t>
             </a:r>
             <a:endParaRPr lang="en-US" sz="1400" dirty="0"/>
           </a:p>
@@ -13810,7 +14268,7 @@
         <p:spPr>
           <a:xfrm>
             <a:off x="0" y="658368"/>
-            <a:ext cx="2468880" cy="5833872"/>
+            <a:ext cx="5120640" cy="5833872"/>
           </a:xfrm>
           <a:prstGeom prst="rect">
             <a:avLst/>
@@ -13825,8 +14283,8 @@
         </p:nvSpPr>
         <p:spPr>
           <a:xfrm>
-            <a:off x="2697480" y="1005840"/>
-            <a:ext cx="9174175" cy="731520"/>
+            <a:off x="5349240" y="1005840"/>
+            <a:ext cx="6522415" cy="731520"/>
           </a:xfrm>
           <a:prstGeom prst="rect">
             <a:avLst/>
@@ -13852,7 +14310,7 @@
                 <a:ea typeface="Times New Roman" pitchFamily="34" charset="-122"/>
                 <a:cs typeface="Times New Roman" pitchFamily="34" charset="-120"/>
               </a:rPr>
-              <a:t>Remediation</a:t>
+              <a:t>Expected Answer</a:t>
             </a:r>
             <a:endParaRPr lang="en-US" sz="3600" dirty="0"/>
           </a:p>
@@ -13866,8 +14324,8 @@
         </p:nvSpPr>
         <p:spPr>
           <a:xfrm>
-            <a:off x="2697480" y="1783080"/>
-            <a:ext cx="9174175" cy="4663440"/>
+            <a:off x="5349240" y="1783080"/>
+            <a:ext cx="6522415" cy="4663440"/>
           </a:xfrm>
           <a:prstGeom prst="rect">
             <a:avLst/>
@@ -13886,7 +14344,7 @@
               <a:buNone/>
             </a:pPr>
             <a:r>
-              <a:rPr lang="en-US" sz="4000" b="1" dirty="0">
+              <a:rPr lang="en-US" sz="4000" dirty="0">
                 <a:solidFill>
                   <a:srgbClr val="111111"/>
                 </a:solidFill>
@@ -13894,73 +14352,7 @@
                 <a:ea typeface="Times New Roman" pitchFamily="34" charset="-122"/>
                 <a:cs typeface="Times New Roman" pitchFamily="34" charset="-120"/>
               </a:rPr>
-              <a:t>Fill in the blanks:</a:t>
-            </a:r>
-            <a:endParaRPr lang="en-US" sz="4000" dirty="0"/>
-          </a:p>
-          <a:p>
-            <a:pPr algn="l" marL="342900" indent="-342900">
-              <a:spcAft>
-                <a:spcPts val="800"/>
-              </a:spcAft>
-              <a:buSzPct val="100000"/>
-              <a:buFont typeface="+mj-lt"/>
-              <a:buAutoNum type="arabicPeriod" startAt="1"/>
-            </a:pPr>
-            <a:r>
-              <a:rPr lang="en-US" sz="4000" dirty="0">
-                <a:solidFill>
-                  <a:srgbClr val="111111"/>
-                </a:solidFill>
-                <a:latin typeface="Times New Roman" pitchFamily="34" charset="0"/>
-                <a:ea typeface="Times New Roman" pitchFamily="34" charset="-122"/>
-                <a:cs typeface="Times New Roman" pitchFamily="34" charset="-120"/>
-              </a:rPr>
-              <a:t>Water falling from clouds is ______.</a:t>
-            </a:r>
-            <a:endParaRPr lang="en-US" sz="4000" dirty="0"/>
-          </a:p>
-          <a:p>
-            <a:pPr algn="l" marL="342900" indent="-342900">
-              <a:spcAft>
-                <a:spcPts val="800"/>
-              </a:spcAft>
-              <a:buSzPct val="100000"/>
-              <a:buFont typeface="+mj-lt"/>
-              <a:buAutoNum type="arabicPeriod" startAt="1"/>
-            </a:pPr>
-            <a:r>
-              <a:rPr lang="en-US" sz="4000" dirty="0">
-                <a:solidFill>
-                  <a:srgbClr val="111111"/>
-                </a:solidFill>
-                <a:latin typeface="Times New Roman" pitchFamily="34" charset="0"/>
-                <a:ea typeface="Times New Roman" pitchFamily="34" charset="-122"/>
-                <a:cs typeface="Times New Roman" pitchFamily="34" charset="-120"/>
-              </a:rPr>
-              <a:t>Balls of ice falling from clouds are ______.</a:t>
-            </a:r>
-            <a:endParaRPr lang="en-US" sz="4000" dirty="0"/>
-          </a:p>
-          <a:p>
-            <a:pPr algn="l" marL="342900" indent="-342900">
-              <a:spcAft>
-                <a:spcPts val="800"/>
-              </a:spcAft>
-              <a:buSzPct val="100000"/>
-              <a:buFont typeface="+mj-lt"/>
-              <a:buAutoNum type="arabicPeriod" startAt="1"/>
-            </a:pPr>
-            <a:r>
-              <a:rPr lang="en-US" sz="4000" dirty="0">
-                <a:solidFill>
-                  <a:srgbClr val="111111"/>
-                </a:solidFill>
-                <a:latin typeface="Times New Roman" pitchFamily="34" charset="0"/>
-                <a:ea typeface="Times New Roman" pitchFamily="34" charset="-122"/>
-                <a:cs typeface="Times New Roman" pitchFamily="34" charset="-120"/>
-              </a:rPr>
-              <a:t>Rain caused by a mountain is ______ rain.</a:t>
+              <a:t>The rain gauge.</a:t>
             </a:r>
             <a:endParaRPr lang="en-US" sz="4000" dirty="0"/>
           </a:p>
@@ -14072,7 +14464,7 @@
                 <a:ea typeface="Calibri" pitchFamily="34" charset="-122"/>
                 <a:cs typeface="Calibri" pitchFamily="34" charset="-120"/>
               </a:rPr>
-              <a:t>HOMEWORK</a:t>
+              <a:t>FORMATIVE EVALUATION</a:t>
             </a:r>
             <a:endParaRPr lang="en-US" sz="1400" dirty="0"/>
           </a:p>
@@ -14137,7 +14529,7 @@
                 <a:ea typeface="Times New Roman" pitchFamily="34" charset="-122"/>
                 <a:cs typeface="Times New Roman" pitchFamily="34" charset="-120"/>
               </a:rPr>
-              <a:t>Homework</a:t>
+              <a:t>Evaluation 2</a:t>
             </a:r>
             <a:endParaRPr lang="en-US" sz="3600" dirty="0"/>
           </a:p>
@@ -14179,7 +14571,7 @@
                 <a:ea typeface="Times New Roman" pitchFamily="34" charset="-122"/>
                 <a:cs typeface="Times New Roman" pitchFamily="34" charset="-120"/>
               </a:rPr>
-              <a:t>Observe the wind in Garoua for three days: from which direction does it blow? Is it dry or moist? Write your observations.</a:t>
+              <a:t>Why does Buea receive a lot of rain?</a:t>
             </a:r>
             <a:endParaRPr lang="en-US" sz="4000" dirty="0"/>
           </a:p>
@@ -14530,7 +14922,7 @@
                 <a:ea typeface="Calibri" pitchFamily="34" charset="-122"/>
                 <a:cs typeface="Calibri" pitchFamily="34" charset="-120"/>
               </a:rPr>
-              <a:t>NEXT LESSON</a:t>
+              <a:t>FORMATIVE EVALUATION</a:t>
             </a:r>
             <a:endParaRPr lang="en-US" sz="1400" dirty="0"/>
           </a:p>
@@ -14595,7 +14987,7 @@
                 <a:ea typeface="Times New Roman" pitchFamily="34" charset="-122"/>
                 <a:cs typeface="Times New Roman" pitchFamily="34" charset="-120"/>
               </a:rPr>
-              <a:t>Next Lesson</a:t>
+              <a:t>Expected Answer</a:t>
             </a:r>
             <a:endParaRPr lang="en-US" sz="3600" dirty="0"/>
           </a:p>
@@ -14619,17 +15011,17 @@
           <a:ln/>
         </p:spPr>
         <p:txBody>
-          <a:bodyPr wrap="square" lIns="0" tIns="0" rIns="0" bIns="0" rtlCol="0" anchor="ctr"/>
-          <a:lstStyle/>
-          <a:p>
-            <a:pPr algn="ctr" indent="0" marL="0">
+          <a:bodyPr wrap="square" lIns="0" tIns="0" rIns="0" bIns="0" rtlCol="0" anchor="t"/>
+          <a:lstStyle/>
+          <a:p>
+            <a:pPr algn="l" indent="0" marL="0">
               <a:spcAft>
                 <a:spcPts val="800"/>
               </a:spcAft>
               <a:buNone/>
             </a:pPr>
             <a:r>
-              <a:rPr lang="en-US" sz="4000" b="1" dirty="0">
+              <a:rPr lang="en-US" sz="4000" dirty="0">
                 <a:solidFill>
                   <a:srgbClr val="111111"/>
                 </a:solidFill>
@@ -14637,27 +15029,7 @@
                 <a:ea typeface="Times New Roman" pitchFamily="34" charset="-122"/>
                 <a:cs typeface="Times New Roman" pitchFamily="34" charset="-120"/>
               </a:rPr>
-              <a:t>Our next lesson will be on:</a:t>
-            </a:r>
-            <a:endParaRPr lang="en-US" sz="4000" dirty="0"/>
-          </a:p>
-          <a:p>
-            <a:pPr algn="ctr" indent="0" marL="0">
-              <a:spcAft>
-                <a:spcPts val="800"/>
-              </a:spcAft>
-              <a:buNone/>
-            </a:pPr>
-            <a:r>
-              <a:rPr lang="en-US" sz="4000" b="1" dirty="0">
-                <a:solidFill>
-                  <a:srgbClr val="990011"/>
-                </a:solidFill>
-                <a:latin typeface="Times New Roman" pitchFamily="34" charset="0"/>
-                <a:ea typeface="Times New Roman" pitchFamily="34" charset="-122"/>
-                <a:cs typeface="Times New Roman" pitchFamily="34" charset="-120"/>
-              </a:rPr>
-              <a:t>Lesson 36: Pressure Belts and Planetary Winds</a:t>
+              <a:t>Mount Cameroon forces wet air to rise (relief rain).</a:t>
             </a:r>
             <a:endParaRPr lang="en-US" sz="4000" dirty="0"/>
           </a:p>
@@ -14769,6 +15141,749 @@
                 <a:ea typeface="Calibri" pitchFamily="34" charset="-122"/>
                 <a:cs typeface="Calibri" pitchFamily="34" charset="-120"/>
               </a:rPr>
+              <a:t>REMEDIATION</a:t>
+            </a:r>
+            <a:endParaRPr lang="en-US" sz="1400" dirty="0"/>
+          </a:p>
+        </p:txBody>
+      </p:sp>
+      <p:pic>
+        <p:nvPicPr>
+          <p:cNvPr id="3" name="Image 0" descr="/home/claude/f4/img/minesec_sheet.png">    </p:cNvPr>
+          <p:cNvPicPr>
+            <a:picLocks noChangeAspect="1"/>
+          </p:cNvPicPr>
+          <p:nvPr/>
+        </p:nvPicPr>
+        <p:blipFill>
+          <a:blip r:embed="rId1"/>
+          <a:stretch>
+            <a:fillRect/>
+          </a:stretch>
+        </p:blipFill>
+        <p:spPr>
+          <a:xfrm>
+            <a:off x="0" y="658368"/>
+            <a:ext cx="2468880" cy="5833872"/>
+          </a:xfrm>
+          <a:prstGeom prst="rect">
+            <a:avLst/>
+          </a:prstGeom>
+        </p:spPr>
+      </p:pic>
+      <p:sp>
+        <p:nvSpPr>
+          <p:cNvPr id="4" name="Text 1"/>
+          <p:cNvSpPr/>
+          <p:nvPr/>
+        </p:nvSpPr>
+        <p:spPr>
+          <a:xfrm>
+            <a:off x="2697480" y="1005840"/>
+            <a:ext cx="9174175" cy="731520"/>
+          </a:xfrm>
+          <a:prstGeom prst="rect">
+            <a:avLst/>
+          </a:prstGeom>
+          <a:noFill/>
+          <a:ln/>
+        </p:spPr>
+        <p:txBody>
+          <a:bodyPr wrap="square" lIns="0" tIns="0" rIns="0" bIns="0" rtlCol="0" anchor="ctr">
+            <a:normAutofit/>
+          </a:bodyPr>
+          <a:lstStyle/>
+          <a:p>
+            <a:pPr algn="ctr" indent="0" marL="0">
+              <a:buNone/>
+            </a:pPr>
+            <a:r>
+              <a:rPr lang="en-US" sz="3600" b="1" dirty="0">
+                <a:solidFill>
+                  <a:srgbClr val="990011"/>
+                </a:solidFill>
+                <a:latin typeface="Times New Roman" pitchFamily="34" charset="0"/>
+                <a:ea typeface="Times New Roman" pitchFamily="34" charset="-122"/>
+                <a:cs typeface="Times New Roman" pitchFamily="34" charset="-120"/>
+              </a:rPr>
+              <a:t>Remediation</a:t>
+            </a:r>
+            <a:endParaRPr lang="en-US" sz="3600" dirty="0"/>
+          </a:p>
+        </p:txBody>
+      </p:sp>
+      <p:sp>
+        <p:nvSpPr>
+          <p:cNvPr id="5" name="Text 2"/>
+          <p:cNvSpPr/>
+          <p:nvPr/>
+        </p:nvSpPr>
+        <p:spPr>
+          <a:xfrm>
+            <a:off x="2697480" y="1783080"/>
+            <a:ext cx="9174175" cy="4663440"/>
+          </a:xfrm>
+          <a:prstGeom prst="rect">
+            <a:avLst/>
+          </a:prstGeom>
+          <a:noFill/>
+          <a:ln/>
+        </p:spPr>
+        <p:txBody>
+          <a:bodyPr wrap="square" lIns="0" tIns="0" rIns="0" bIns="0" rtlCol="0" anchor="t"/>
+          <a:lstStyle/>
+          <a:p>
+            <a:pPr algn="l" indent="0" marL="0">
+              <a:spcAft>
+                <a:spcPts val="800"/>
+              </a:spcAft>
+              <a:buNone/>
+            </a:pPr>
+            <a:r>
+              <a:rPr lang="en-US" sz="4000" b="1" dirty="0">
+                <a:solidFill>
+                  <a:srgbClr val="111111"/>
+                </a:solidFill>
+                <a:latin typeface="Times New Roman" pitchFamily="34" charset="0"/>
+                <a:ea typeface="Times New Roman" pitchFamily="34" charset="-122"/>
+                <a:cs typeface="Times New Roman" pitchFamily="34" charset="-120"/>
+              </a:rPr>
+              <a:t>Fill in the blanks:</a:t>
+            </a:r>
+            <a:endParaRPr lang="en-US" sz="4000" dirty="0"/>
+          </a:p>
+          <a:p>
+            <a:pPr algn="l" marL="342900" indent="-342900">
+              <a:spcAft>
+                <a:spcPts val="800"/>
+              </a:spcAft>
+              <a:buSzPct val="100000"/>
+              <a:buFont typeface="+mj-lt"/>
+              <a:buAutoNum type="arabicPeriod" startAt="1"/>
+            </a:pPr>
+            <a:r>
+              <a:rPr lang="en-US" sz="4000" dirty="0">
+                <a:solidFill>
+                  <a:srgbClr val="111111"/>
+                </a:solidFill>
+                <a:latin typeface="Times New Roman" pitchFamily="34" charset="0"/>
+                <a:ea typeface="Times New Roman" pitchFamily="34" charset="-122"/>
+                <a:cs typeface="Times New Roman" pitchFamily="34" charset="-120"/>
+              </a:rPr>
+              <a:t>Water falling from clouds is ______.</a:t>
+            </a:r>
+            <a:endParaRPr lang="en-US" sz="4000" dirty="0"/>
+          </a:p>
+          <a:p>
+            <a:pPr algn="l" marL="342900" indent="-342900">
+              <a:spcAft>
+                <a:spcPts val="800"/>
+              </a:spcAft>
+              <a:buSzPct val="100000"/>
+              <a:buFont typeface="+mj-lt"/>
+              <a:buAutoNum type="arabicPeriod" startAt="1"/>
+            </a:pPr>
+            <a:r>
+              <a:rPr lang="en-US" sz="4000" dirty="0">
+                <a:solidFill>
+                  <a:srgbClr val="111111"/>
+                </a:solidFill>
+                <a:latin typeface="Times New Roman" pitchFamily="34" charset="0"/>
+                <a:ea typeface="Times New Roman" pitchFamily="34" charset="-122"/>
+                <a:cs typeface="Times New Roman" pitchFamily="34" charset="-120"/>
+              </a:rPr>
+              <a:t>Balls of ice falling from clouds are ______.</a:t>
+            </a:r>
+            <a:endParaRPr lang="en-US" sz="4000" dirty="0"/>
+          </a:p>
+          <a:p>
+            <a:pPr algn="l" marL="342900" indent="-342900">
+              <a:spcAft>
+                <a:spcPts val="800"/>
+              </a:spcAft>
+              <a:buSzPct val="100000"/>
+              <a:buFont typeface="+mj-lt"/>
+              <a:buAutoNum type="arabicPeriod" startAt="1"/>
+            </a:pPr>
+            <a:r>
+              <a:rPr lang="en-US" sz="4000" dirty="0">
+                <a:solidFill>
+                  <a:srgbClr val="111111"/>
+                </a:solidFill>
+                <a:latin typeface="Times New Roman" pitchFamily="34" charset="0"/>
+                <a:ea typeface="Times New Roman" pitchFamily="34" charset="-122"/>
+                <a:cs typeface="Times New Roman" pitchFamily="34" charset="-120"/>
+              </a:rPr>
+              <a:t>Rain caused by a mountain is ______ rain.</a:t>
+            </a:r>
+            <a:endParaRPr lang="en-US" sz="4000" dirty="0"/>
+          </a:p>
+        </p:txBody>
+      </p:sp>
+      <p:sp>
+        <p:nvSpPr>
+          <p:cNvPr id="25" name="Slide Number Placeholder 0"/>
+          <p:cNvSpPr>
+            <a:spLocks noGrp="1"/>
+          </p:cNvSpPr>
+          <p:nvPr>
+            <p:ph type="sldNum" sz="quarter" idx="4294967295"/>
+          </p:nvPr>
+        </p:nvSpPr>
+        <p:spPr>
+          <a:xfrm>
+            <a:off x="27432" y="91440"/>
+            <a:ext cx="585216" cy="475488"/>
+          </a:xfrm>
+          <a:prstGeom prst="rect">
+            <a:avLst/>
+          </a:prstGeom>
+          <a:extLst>
+            <a:ext uri="{C572A759-6A51-4108-AA02-DFA0A04FC94B}">
+              <ma14:wrappingTextBoxFlag xmlns:ma14="http://schemas.microsoft.com/office/mac/drawingml/2011/main" val="0"/>
+            </a:ext>
+          </a:extLst>
+        </p:spPr>
+        <p:txBody>
+          <a:bodyPr/>
+          <a:lstStyle>
+            <a:lvl1pPr>
+              <a:defRPr sz="2000">
+                <a:solidFill>
+                  <a:srgbClr val="FFFFFF"/>
+                </a:solidFill>
+                <a:latin typeface="Calibri"/>
+                <a:ea typeface="Calibri"/>
+                <a:cs typeface="Calibri"/>
+              </a:defRPr>
+            </a:lvl1pPr>
+          </a:lstStyle>
+          <a:p>
+            <a:pPr algn="ctr"/>
+            <a:fld id="{F7021451-1387-4CA6-816F-3879F97B5CBC}" type="slidenum">
+              <a:rPr b="1" lang="en-US"/>
+              <a:t>41</a:t>
+            </a:fld>
+            <a:endParaRPr lang="en-US"/>
+          </a:p>
+        </p:txBody>
+      </p:sp>
+    </p:spTree>
+  </p:cSld>
+  <p:clrMapOvr>
+    <a:masterClrMapping/>
+  </p:clrMapOvr>
+</p:sld>
+</file>
+
+<file path=ppt/slides/slide42.xml><?xml version="1.0" encoding="utf-8"?>
+<p:sld xmlns:a="http://schemas.openxmlformats.org/drawingml/2006/main" xmlns:r="http://schemas.openxmlformats.org/officeDocument/2006/relationships" xmlns:p="http://schemas.openxmlformats.org/presentationml/2006/main">
+  <p:cSld name="Slide 42">
+    <p:spTree>
+      <p:nvGrpSpPr>
+        <p:cNvPr id="1" name=""/>
+        <p:cNvGrpSpPr/>
+        <p:nvPr/>
+      </p:nvGrpSpPr>
+      <p:grpSpPr>
+        <a:xfrm>
+          <a:off x="0" y="0"/>
+          <a:ext cx="0" cy="0"/>
+          <a:chOff x="0" y="0"/>
+          <a:chExt cx="0" cy="0"/>
+        </a:xfrm>
+      </p:grpSpPr>
+      <p:sp>
+        <p:nvSpPr>
+          <p:cNvPr id="2" name="Text 0"/>
+          <p:cNvSpPr/>
+          <p:nvPr/>
+        </p:nvSpPr>
+        <p:spPr>
+          <a:xfrm>
+            <a:off x="457200" y="713232"/>
+            <a:ext cx="11368735" cy="274320"/>
+          </a:xfrm>
+          <a:prstGeom prst="rect">
+            <a:avLst/>
+          </a:prstGeom>
+          <a:noFill/>
+          <a:ln/>
+        </p:spPr>
+        <p:txBody>
+          <a:bodyPr wrap="square" lIns="0" tIns="0" rIns="0" bIns="0" rtlCol="0" anchor="ctr"/>
+          <a:lstStyle/>
+          <a:p>
+            <a:pPr algn="r" indent="0" marL="0">
+              <a:buNone/>
+            </a:pPr>
+            <a:r>
+              <a:rPr lang="en-US" sz="1400" b="1" dirty="0">
+                <a:solidFill>
+                  <a:srgbClr val="1C3F6E"/>
+                </a:solidFill>
+                <a:latin typeface="Calibri" pitchFamily="34" charset="0"/>
+                <a:ea typeface="Calibri" pitchFamily="34" charset="-122"/>
+                <a:cs typeface="Calibri" pitchFamily="34" charset="-120"/>
+              </a:rPr>
+              <a:t>HOMEWORK</a:t>
+            </a:r>
+            <a:endParaRPr lang="en-US" sz="1400" dirty="0"/>
+          </a:p>
+        </p:txBody>
+      </p:sp>
+      <p:pic>
+        <p:nvPicPr>
+          <p:cNvPr id="3" name="Image 0" descr="/home/claude/f4/img/minesec_sheet.png">    </p:cNvPr>
+          <p:cNvPicPr>
+            <a:picLocks noChangeAspect="1"/>
+          </p:cNvPicPr>
+          <p:nvPr/>
+        </p:nvPicPr>
+        <p:blipFill>
+          <a:blip r:embed="rId1"/>
+          <a:stretch>
+            <a:fillRect/>
+          </a:stretch>
+        </p:blipFill>
+        <p:spPr>
+          <a:xfrm>
+            <a:off x="0" y="658368"/>
+            <a:ext cx="5120640" cy="5833872"/>
+          </a:xfrm>
+          <a:prstGeom prst="rect">
+            <a:avLst/>
+          </a:prstGeom>
+        </p:spPr>
+      </p:pic>
+      <p:sp>
+        <p:nvSpPr>
+          <p:cNvPr id="4" name="Text 1"/>
+          <p:cNvSpPr/>
+          <p:nvPr/>
+        </p:nvSpPr>
+        <p:spPr>
+          <a:xfrm>
+            <a:off x="5349240" y="1005840"/>
+            <a:ext cx="6522415" cy="731520"/>
+          </a:xfrm>
+          <a:prstGeom prst="rect">
+            <a:avLst/>
+          </a:prstGeom>
+          <a:noFill/>
+          <a:ln/>
+        </p:spPr>
+        <p:txBody>
+          <a:bodyPr wrap="square" lIns="0" tIns="0" rIns="0" bIns="0" rtlCol="0" anchor="ctr">
+            <a:normAutofit/>
+          </a:bodyPr>
+          <a:lstStyle/>
+          <a:p>
+            <a:pPr algn="ctr" indent="0" marL="0">
+              <a:buNone/>
+            </a:pPr>
+            <a:r>
+              <a:rPr lang="en-US" sz="3600" b="1" dirty="0">
+                <a:solidFill>
+                  <a:srgbClr val="990011"/>
+                </a:solidFill>
+                <a:latin typeface="Times New Roman" pitchFamily="34" charset="0"/>
+                <a:ea typeface="Times New Roman" pitchFamily="34" charset="-122"/>
+                <a:cs typeface="Times New Roman" pitchFamily="34" charset="-120"/>
+              </a:rPr>
+              <a:t>Homework</a:t>
+            </a:r>
+            <a:endParaRPr lang="en-US" sz="3600" dirty="0"/>
+          </a:p>
+        </p:txBody>
+      </p:sp>
+      <p:sp>
+        <p:nvSpPr>
+          <p:cNvPr id="5" name="Text 2"/>
+          <p:cNvSpPr/>
+          <p:nvPr/>
+        </p:nvSpPr>
+        <p:spPr>
+          <a:xfrm>
+            <a:off x="5349240" y="1783080"/>
+            <a:ext cx="6522415" cy="4663440"/>
+          </a:xfrm>
+          <a:prstGeom prst="rect">
+            <a:avLst/>
+          </a:prstGeom>
+          <a:noFill/>
+          <a:ln/>
+        </p:spPr>
+        <p:txBody>
+          <a:bodyPr wrap="square" lIns="0" tIns="0" rIns="0" bIns="0" rtlCol="0" anchor="t"/>
+          <a:lstStyle/>
+          <a:p>
+            <a:pPr algn="l" indent="0" marL="0">
+              <a:spcAft>
+                <a:spcPts val="800"/>
+              </a:spcAft>
+              <a:buNone/>
+            </a:pPr>
+            <a:r>
+              <a:rPr lang="en-US" sz="4000" dirty="0">
+                <a:solidFill>
+                  <a:srgbClr val="111111"/>
+                </a:solidFill>
+                <a:latin typeface="Times New Roman" pitchFamily="34" charset="0"/>
+                <a:ea typeface="Times New Roman" pitchFamily="34" charset="-122"/>
+                <a:cs typeface="Times New Roman" pitchFamily="34" charset="-120"/>
+              </a:rPr>
+              <a:t>Observe the wind in Garoua for three days: from which direction does it blow? Is it dry or moist? Write your observations.</a:t>
+            </a:r>
+            <a:endParaRPr lang="en-US" sz="4000" dirty="0"/>
+          </a:p>
+        </p:txBody>
+      </p:sp>
+      <p:sp>
+        <p:nvSpPr>
+          <p:cNvPr id="25" name="Slide Number Placeholder 0"/>
+          <p:cNvSpPr>
+            <a:spLocks noGrp="1"/>
+          </p:cNvSpPr>
+          <p:nvPr>
+            <p:ph type="sldNum" sz="quarter" idx="4294967295"/>
+          </p:nvPr>
+        </p:nvSpPr>
+        <p:spPr>
+          <a:xfrm>
+            <a:off x="27432" y="91440"/>
+            <a:ext cx="585216" cy="475488"/>
+          </a:xfrm>
+          <a:prstGeom prst="rect">
+            <a:avLst/>
+          </a:prstGeom>
+          <a:extLst>
+            <a:ext uri="{C572A759-6A51-4108-AA02-DFA0A04FC94B}">
+              <ma14:wrappingTextBoxFlag xmlns:ma14="http://schemas.microsoft.com/office/mac/drawingml/2011/main" val="0"/>
+            </a:ext>
+          </a:extLst>
+        </p:spPr>
+        <p:txBody>
+          <a:bodyPr/>
+          <a:lstStyle>
+            <a:lvl1pPr>
+              <a:defRPr sz="2000">
+                <a:solidFill>
+                  <a:srgbClr val="FFFFFF"/>
+                </a:solidFill>
+                <a:latin typeface="Calibri"/>
+                <a:ea typeface="Calibri"/>
+                <a:cs typeface="Calibri"/>
+              </a:defRPr>
+            </a:lvl1pPr>
+          </a:lstStyle>
+          <a:p>
+            <a:pPr algn="ctr"/>
+            <a:fld id="{F7021451-1387-4CA6-816F-3879F97B5CBC}" type="slidenum">
+              <a:rPr b="1" lang="en-US"/>
+              <a:t>42</a:t>
+            </a:fld>
+            <a:endParaRPr lang="en-US"/>
+          </a:p>
+        </p:txBody>
+      </p:sp>
+    </p:spTree>
+  </p:cSld>
+  <p:clrMapOvr>
+    <a:masterClrMapping/>
+  </p:clrMapOvr>
+</p:sld>
+</file>
+
+<file path=ppt/slides/slide43.xml><?xml version="1.0" encoding="utf-8"?>
+<p:sld xmlns:a="http://schemas.openxmlformats.org/drawingml/2006/main" xmlns:r="http://schemas.openxmlformats.org/officeDocument/2006/relationships" xmlns:p="http://schemas.openxmlformats.org/presentationml/2006/main">
+  <p:cSld name="Slide 43">
+    <p:spTree>
+      <p:nvGrpSpPr>
+        <p:cNvPr id="1" name=""/>
+        <p:cNvGrpSpPr/>
+        <p:nvPr/>
+      </p:nvGrpSpPr>
+      <p:grpSpPr>
+        <a:xfrm>
+          <a:off x="0" y="0"/>
+          <a:ext cx="0" cy="0"/>
+          <a:chOff x="0" y="0"/>
+          <a:chExt cx="0" cy="0"/>
+        </a:xfrm>
+      </p:grpSpPr>
+      <p:sp>
+        <p:nvSpPr>
+          <p:cNvPr id="2" name="Text 0"/>
+          <p:cNvSpPr/>
+          <p:nvPr/>
+        </p:nvSpPr>
+        <p:spPr>
+          <a:xfrm>
+            <a:off x="457200" y="713232"/>
+            <a:ext cx="11368735" cy="274320"/>
+          </a:xfrm>
+          <a:prstGeom prst="rect">
+            <a:avLst/>
+          </a:prstGeom>
+          <a:noFill/>
+          <a:ln/>
+        </p:spPr>
+        <p:txBody>
+          <a:bodyPr wrap="square" lIns="0" tIns="0" rIns="0" bIns="0" rtlCol="0" anchor="ctr"/>
+          <a:lstStyle/>
+          <a:p>
+            <a:pPr algn="r" indent="0" marL="0">
+              <a:buNone/>
+            </a:pPr>
+            <a:r>
+              <a:rPr lang="en-US" sz="1400" b="1" dirty="0">
+                <a:solidFill>
+                  <a:srgbClr val="1C3F6E"/>
+                </a:solidFill>
+                <a:latin typeface="Calibri" pitchFamily="34" charset="0"/>
+                <a:ea typeface="Calibri" pitchFamily="34" charset="-122"/>
+                <a:cs typeface="Calibri" pitchFamily="34" charset="-120"/>
+              </a:rPr>
+              <a:t>NEXT LESSON</a:t>
+            </a:r>
+            <a:endParaRPr lang="en-US" sz="1400" dirty="0"/>
+          </a:p>
+        </p:txBody>
+      </p:sp>
+      <p:pic>
+        <p:nvPicPr>
+          <p:cNvPr id="3" name="Image 0" descr="/home/claude/f4/img/minesec_sheet.png">    </p:cNvPr>
+          <p:cNvPicPr>
+            <a:picLocks noChangeAspect="1"/>
+          </p:cNvPicPr>
+          <p:nvPr/>
+        </p:nvPicPr>
+        <p:blipFill>
+          <a:blip r:embed="rId1"/>
+          <a:stretch>
+            <a:fillRect/>
+          </a:stretch>
+        </p:blipFill>
+        <p:spPr>
+          <a:xfrm>
+            <a:off x="0" y="658368"/>
+            <a:ext cx="5120640" cy="5833872"/>
+          </a:xfrm>
+          <a:prstGeom prst="rect">
+            <a:avLst/>
+          </a:prstGeom>
+        </p:spPr>
+      </p:pic>
+      <p:sp>
+        <p:nvSpPr>
+          <p:cNvPr id="4" name="Text 1"/>
+          <p:cNvSpPr/>
+          <p:nvPr/>
+        </p:nvSpPr>
+        <p:spPr>
+          <a:xfrm>
+            <a:off x="5349240" y="1005840"/>
+            <a:ext cx="6522415" cy="731520"/>
+          </a:xfrm>
+          <a:prstGeom prst="rect">
+            <a:avLst/>
+          </a:prstGeom>
+          <a:noFill/>
+          <a:ln/>
+        </p:spPr>
+        <p:txBody>
+          <a:bodyPr wrap="square" lIns="0" tIns="0" rIns="0" bIns="0" rtlCol="0" anchor="ctr">
+            <a:normAutofit/>
+          </a:bodyPr>
+          <a:lstStyle/>
+          <a:p>
+            <a:pPr algn="ctr" indent="0" marL="0">
+              <a:buNone/>
+            </a:pPr>
+            <a:r>
+              <a:rPr lang="en-US" sz="3600" b="1" dirty="0">
+                <a:solidFill>
+                  <a:srgbClr val="990011"/>
+                </a:solidFill>
+                <a:latin typeface="Times New Roman" pitchFamily="34" charset="0"/>
+                <a:ea typeface="Times New Roman" pitchFamily="34" charset="-122"/>
+                <a:cs typeface="Times New Roman" pitchFamily="34" charset="-120"/>
+              </a:rPr>
+              <a:t>Next Lesson</a:t>
+            </a:r>
+            <a:endParaRPr lang="en-US" sz="3600" dirty="0"/>
+          </a:p>
+        </p:txBody>
+      </p:sp>
+      <p:sp>
+        <p:nvSpPr>
+          <p:cNvPr id="5" name="Text 2"/>
+          <p:cNvSpPr/>
+          <p:nvPr/>
+        </p:nvSpPr>
+        <p:spPr>
+          <a:xfrm>
+            <a:off x="5349240" y="1783080"/>
+            <a:ext cx="6522415" cy="4663440"/>
+          </a:xfrm>
+          <a:prstGeom prst="rect">
+            <a:avLst/>
+          </a:prstGeom>
+          <a:noFill/>
+          <a:ln/>
+        </p:spPr>
+        <p:txBody>
+          <a:bodyPr wrap="square" lIns="0" tIns="0" rIns="0" bIns="0" rtlCol="0" anchor="ctr"/>
+          <a:lstStyle/>
+          <a:p>
+            <a:pPr algn="ctr" indent="0" marL="0">
+              <a:spcAft>
+                <a:spcPts val="800"/>
+              </a:spcAft>
+              <a:buNone/>
+            </a:pPr>
+            <a:r>
+              <a:rPr lang="en-US" sz="4000" b="1" dirty="0">
+                <a:solidFill>
+                  <a:srgbClr val="111111"/>
+                </a:solidFill>
+                <a:latin typeface="Times New Roman" pitchFamily="34" charset="0"/>
+                <a:ea typeface="Times New Roman" pitchFamily="34" charset="-122"/>
+                <a:cs typeface="Times New Roman" pitchFamily="34" charset="-120"/>
+              </a:rPr>
+              <a:t>Our next lesson will be on:</a:t>
+            </a:r>
+            <a:endParaRPr lang="en-US" sz="4000" dirty="0"/>
+          </a:p>
+          <a:p>
+            <a:pPr algn="ctr" indent="0" marL="0">
+              <a:spcAft>
+                <a:spcPts val="800"/>
+              </a:spcAft>
+              <a:buNone/>
+            </a:pPr>
+            <a:r>
+              <a:rPr lang="en-US" sz="4000" b="1" dirty="0">
+                <a:solidFill>
+                  <a:srgbClr val="990011"/>
+                </a:solidFill>
+                <a:latin typeface="Times New Roman" pitchFamily="34" charset="0"/>
+                <a:ea typeface="Times New Roman" pitchFamily="34" charset="-122"/>
+                <a:cs typeface="Times New Roman" pitchFamily="34" charset="-120"/>
+              </a:rPr>
+              <a:t>Lesson 36: Pressure Belts and Planetary Winds</a:t>
+            </a:r>
+            <a:endParaRPr lang="en-US" sz="4000" dirty="0"/>
+          </a:p>
+        </p:txBody>
+      </p:sp>
+      <p:sp>
+        <p:nvSpPr>
+          <p:cNvPr id="25" name="Slide Number Placeholder 0"/>
+          <p:cNvSpPr>
+            <a:spLocks noGrp="1"/>
+          </p:cNvSpPr>
+          <p:nvPr>
+            <p:ph type="sldNum" sz="quarter" idx="4294967295"/>
+          </p:nvPr>
+        </p:nvSpPr>
+        <p:spPr>
+          <a:xfrm>
+            <a:off x="27432" y="91440"/>
+            <a:ext cx="585216" cy="475488"/>
+          </a:xfrm>
+          <a:prstGeom prst="rect">
+            <a:avLst/>
+          </a:prstGeom>
+          <a:extLst>
+            <a:ext uri="{C572A759-6A51-4108-AA02-DFA0A04FC94B}">
+              <ma14:wrappingTextBoxFlag xmlns:ma14="http://schemas.microsoft.com/office/mac/drawingml/2011/main" val="0"/>
+            </a:ext>
+          </a:extLst>
+        </p:spPr>
+        <p:txBody>
+          <a:bodyPr/>
+          <a:lstStyle>
+            <a:lvl1pPr>
+              <a:defRPr sz="2000">
+                <a:solidFill>
+                  <a:srgbClr val="FFFFFF"/>
+                </a:solidFill>
+                <a:latin typeface="Calibri"/>
+                <a:ea typeface="Calibri"/>
+                <a:cs typeface="Calibri"/>
+              </a:defRPr>
+            </a:lvl1pPr>
+          </a:lstStyle>
+          <a:p>
+            <a:pPr algn="ctr"/>
+            <a:fld id="{F7021451-1387-4CA6-816F-3879F97B5CBC}" type="slidenum">
+              <a:rPr b="1" lang="en-US"/>
+              <a:t>43</a:t>
+            </a:fld>
+            <a:endParaRPr lang="en-US"/>
+          </a:p>
+        </p:txBody>
+      </p:sp>
+    </p:spTree>
+  </p:cSld>
+  <p:clrMapOvr>
+    <a:masterClrMapping/>
+  </p:clrMapOvr>
+</p:sld>
+</file>
+
+<file path=ppt/slides/slide44.xml><?xml version="1.0" encoding="utf-8"?>
+<p:sld xmlns:a="http://schemas.openxmlformats.org/drawingml/2006/main" xmlns:r="http://schemas.openxmlformats.org/officeDocument/2006/relationships" xmlns:p="http://schemas.openxmlformats.org/presentationml/2006/main">
+  <p:cSld name="Slide 44">
+    <p:spTree>
+      <p:nvGrpSpPr>
+        <p:cNvPr id="1" name=""/>
+        <p:cNvGrpSpPr/>
+        <p:nvPr/>
+      </p:nvGrpSpPr>
+      <p:grpSpPr>
+        <a:xfrm>
+          <a:off x="0" y="0"/>
+          <a:ext cx="0" cy="0"/>
+          <a:chOff x="0" y="0"/>
+          <a:chExt cx="0" cy="0"/>
+        </a:xfrm>
+      </p:grpSpPr>
+      <p:sp>
+        <p:nvSpPr>
+          <p:cNvPr id="2" name="Text 0"/>
+          <p:cNvSpPr/>
+          <p:nvPr/>
+        </p:nvSpPr>
+        <p:spPr>
+          <a:xfrm>
+            <a:off x="457200" y="713232"/>
+            <a:ext cx="11368735" cy="274320"/>
+          </a:xfrm>
+          <a:prstGeom prst="rect">
+            <a:avLst/>
+          </a:prstGeom>
+          <a:noFill/>
+          <a:ln/>
+        </p:spPr>
+        <p:txBody>
+          <a:bodyPr wrap="square" lIns="0" tIns="0" rIns="0" bIns="0" rtlCol="0" anchor="ctr"/>
+          <a:lstStyle/>
+          <a:p>
+            <a:pPr algn="r" indent="0" marL="0">
+              <a:buNone/>
+            </a:pPr>
+            <a:r>
+              <a:rPr lang="en-US" sz="1400" b="1" dirty="0">
+                <a:solidFill>
+                  <a:srgbClr val="1C3F6E"/>
+                </a:solidFill>
+                <a:latin typeface="Calibri" pitchFamily="34" charset="0"/>
+                <a:ea typeface="Calibri" pitchFamily="34" charset="-122"/>
+                <a:cs typeface="Calibri" pitchFamily="34" charset="-120"/>
+              </a:rPr>
               <a:t>BILINGUAL GAME</a:t>
             </a:r>
             <a:endParaRPr lang="en-US" sz="1400" dirty="0"/>
@@ -14816,7 +15931,7 @@
       </p:sp>
       <p:graphicFrame>
         <p:nvGraphicFramePr>
-          <p:cNvPr id="42" name="Table 0"/>
+          <p:cNvPr id="45" name="Table 0"/>
           <p:cNvGraphicFramePr>
             <a:graphicFrameLocks noGrp="1"/>
           </p:cNvGraphicFramePr>
@@ -16128,7 +17243,7 @@
             <a:pPr algn="ctr"/>
             <a:fld id="{F7021451-1387-4CA6-816F-3879F97B5CBC}" type="slidenum">
               <a:rPr b="1" lang="en-US"/>
-              <a:t>41</a:t>
+              <a:t>44</a:t>
             </a:fld>
             <a:endParaRPr lang="en-US"/>
           </a:p>
@@ -16142,9 +17257,9 @@
 </p:sld>
 </file>
 
-<file path=ppt/slides/slide42.xml><?xml version="1.0" encoding="utf-8"?>
+<file path=ppt/slides/slide45.xml><?xml version="1.0" encoding="utf-8"?>
 <p:sld xmlns:a="http://schemas.openxmlformats.org/drawingml/2006/main" xmlns:r="http://schemas.openxmlformats.org/officeDocument/2006/relationships" xmlns:p="http://schemas.openxmlformats.org/presentationml/2006/main">
-  <p:cSld name="Slide 42">
+  <p:cSld name="Slide 45">
     <p:spTree>
       <p:nvGrpSpPr>
         <p:cNvPr id="1" name=""/>
@@ -16239,7 +17354,7 @@
       </p:sp>
       <p:graphicFrame>
         <p:nvGraphicFramePr>
-          <p:cNvPr id="43" name="Table 0"/>
+          <p:cNvPr id="46" name="Table 0"/>
           <p:cNvGraphicFramePr>
             <a:graphicFrameLocks noGrp="1"/>
           </p:cNvGraphicFramePr>
@@ -16861,7 +17976,7 @@
             <a:pPr algn="ctr"/>
             <a:fld id="{F7021451-1387-4CA6-816F-3879F97B5CBC}" type="slidenum">
               <a:rPr b="1" lang="en-US"/>
-              <a:t>42</a:t>
+              <a:t>45</a:t>
             </a:fld>
             <a:endParaRPr lang="en-US"/>
           </a:p>
@@ -16875,9 +17990,9 @@
 </p:sld>
 </file>
 
-<file path=ppt/slides/slide43.xml><?xml version="1.0" encoding="utf-8"?>
+<file path=ppt/slides/slide46.xml><?xml version="1.0" encoding="utf-8"?>
 <p:sld xmlns:a="http://schemas.openxmlformats.org/drawingml/2006/main" xmlns:r="http://schemas.openxmlformats.org/officeDocument/2006/relationships" xmlns:p="http://schemas.openxmlformats.org/presentationml/2006/main">
-  <p:cSld name="Slide 43">
+  <p:cSld name="Slide 46">
     <p:spTree>
       <p:nvGrpSpPr>
         <p:cNvPr id="1" name=""/>
@@ -16972,7 +18087,7 @@
       </p:sp>
       <p:graphicFrame>
         <p:nvGraphicFramePr>
-          <p:cNvPr id="44" name="Table 0"/>
+          <p:cNvPr id="47" name="Table 0"/>
           <p:cNvGraphicFramePr>
             <a:graphicFrameLocks noGrp="1"/>
           </p:cNvGraphicFramePr>
@@ -17082,7 +18197,7 @@
                           <a:ea typeface="Calibri" pitchFamily="34" charset="-122"/>
                           <a:cs typeface="Calibri" pitchFamily="34" charset="-120"/>
                         </a:rPr>
-                        <a:t>Meaning and Forms of Precipitation; Measurement of Rainfall; Types of Rainfall.</a:t>
+                        <a:t>DEFINITIONS; Measurement of Rainfall; Types of Rainfall.</a:t>
                       </a:r>
                       <a:endParaRPr lang="en-US" sz="1600" dirty="0">
                         <a:latin typeface="Calibri" charset="0"/>
@@ -17732,7 +18847,7 @@
             <a:pPr algn="ctr"/>
             <a:fld id="{F7021451-1387-4CA6-816F-3879F97B5CBC}" type="slidenum">
               <a:rPr b="1" lang="en-US"/>
-              <a:t>43</a:t>
+              <a:t>46</a:t>
             </a:fld>
             <a:endParaRPr lang="en-US"/>
           </a:p>
@@ -17746,9 +18861,9 @@
 </p:sld>
 </file>
 
-<file path=ppt/slides/slide44.xml><?xml version="1.0" encoding="utf-8"?>
+<file path=ppt/slides/slide47.xml><?xml version="1.0" encoding="utf-8"?>
 <p:sld xmlns:a="http://schemas.openxmlformats.org/drawingml/2006/main" xmlns:r="http://schemas.openxmlformats.org/officeDocument/2006/relationships" xmlns:p="http://schemas.openxmlformats.org/presentationml/2006/main">
-  <p:cSld name="Slide 44">
+  <p:cSld name="Slide 47">
     <p:spTree>
       <p:nvGrpSpPr>
         <p:cNvPr id="1" name=""/>
@@ -17946,7 +19061,7 @@
                 <a:ea typeface="Calibri" pitchFamily="34" charset="-122"/>
                 <a:cs typeface="Calibri" pitchFamily="34" charset="-120"/>
               </a:rPr>
-              <a:t>Without the projector (Activity 1): ask learners to name what can fall from clouds.</a:t>
+              <a:t>Without the projector (Activity 1): list forms of water falling from the sky.</a:t>
             </a:r>
             <a:endParaRPr lang="en-US" sz="2000" dirty="0"/>
           </a:p>
@@ -17967,7 +19082,7 @@
                 <a:ea typeface="Calibri" pitchFamily="34" charset="-122"/>
                 <a:cs typeface="Calibri" pitchFamily="34" charset="-120"/>
               </a:rPr>
-              <a:t>Without the projector (Activity 2): make a rain gauge with a bottle and a funnel.</a:t>
+              <a:t>Without the projector (Activity 2): use a straight-sided tin.</a:t>
             </a:r>
             <a:endParaRPr lang="en-US" sz="2000" dirty="0"/>
           </a:p>
@@ -17988,7 +19103,7 @@
                 <a:ea typeface="Calibri" pitchFamily="34" charset="-122"/>
                 <a:cs typeface="Calibri" pitchFamily="34" charset="-120"/>
               </a:rPr>
-              <a:t>Without the projector (Activity 3): draw the ground, rising air and a cloud.</a:t>
+              <a:t>Without the projector (Activity 3): describe afternoon storms in Garoua.</a:t>
             </a:r>
             <a:endParaRPr lang="en-US" sz="2000" dirty="0"/>
           </a:p>
@@ -18036,7 +19151,7 @@
             <a:pPr algn="ctr"/>
             <a:fld id="{F7021451-1387-4CA6-816F-3879F97B5CBC}" type="slidenum">
               <a:rPr b="1" lang="en-US"/>
-              <a:t>44</a:t>
+              <a:t>47</a:t>
             </a:fld>
             <a:endParaRPr lang="en-US"/>
           </a:p>
@@ -18050,9 +19165,9 @@
 </p:sld>
 </file>
 
-<file path=ppt/slides/slide45.xml><?xml version="1.0" encoding="utf-8"?>
+<file path=ppt/slides/slide48.xml><?xml version="1.0" encoding="utf-8"?>
 <p:sld xmlns:a="http://schemas.openxmlformats.org/drawingml/2006/main" xmlns:r="http://schemas.openxmlformats.org/officeDocument/2006/relationships" xmlns:p="http://schemas.openxmlformats.org/presentationml/2006/main">
-  <p:cSld name="Slide 45">
+  <p:cSld name="Slide 48">
     <p:spTree>
       <p:nvGrpSpPr>
         <p:cNvPr id="1" name=""/>
@@ -18340,7 +19455,7 @@
             <a:pPr algn="ctr"/>
             <a:fld id="{F7021451-1387-4CA6-816F-3879F97B5CBC}" type="slidenum">
               <a:rPr b="1" lang="en-US"/>
-              <a:t>45</a:t>
+              <a:t>48</a:t>
             </a:fld>
             <a:endParaRPr lang="en-US"/>
           </a:p>
@@ -19524,7 +20639,7 @@
         <p:spPr>
           <a:xfrm>
             <a:off x="0" y="658368"/>
-            <a:ext cx="5120640" cy="5833872"/>
+            <a:ext cx="2468880" cy="5833872"/>
           </a:xfrm>
           <a:prstGeom prst="rect">
             <a:avLst/>
@@ -19539,8 +20654,8 @@
         </p:nvSpPr>
         <p:spPr>
           <a:xfrm>
-            <a:off x="5349240" y="1005840"/>
-            <a:ext cx="6522415" cy="731520"/>
+            <a:off x="2697480" y="1005840"/>
+            <a:ext cx="9174175" cy="731520"/>
           </a:xfrm>
           <a:prstGeom prst="rect">
             <a:avLst/>
@@ -19580,8 +20695,8 @@
         </p:nvSpPr>
         <p:spPr>
           <a:xfrm>
-            <a:off x="5349240" y="1783080"/>
-            <a:ext cx="6522415" cy="4663440"/>
+            <a:off x="2697480" y="1783080"/>
+            <a:ext cx="9174175" cy="4663440"/>
           </a:xfrm>
           <a:prstGeom prst="rect">
             <a:avLst/>
@@ -19608,7 +20723,7 @@
                 <a:ea typeface="Times New Roman" pitchFamily="34" charset="-122"/>
                 <a:cs typeface="Times New Roman" pitchFamily="34" charset="-120"/>
               </a:rPr>
-              <a:t>In September, Garoua has short, heavy afternoon storms. Emmanuel's cousin in Buea, on Mount Cameroon, says that it rains there for many days without stopping.</a:t>
+              <a:t>In September, Garoua has short, heavy afternoon storms. Emmanuel's cousin in Buea, on the slopes of Mount Cameroon, says that it rains there for many days without stopping. Emmanuel asks: "Why does it rain differently in the two towns, and how do we measure the rain?"</a:t>
             </a:r>
             <a:endParaRPr lang="en-US" sz="4000" dirty="0"/>
           </a:p>

--- a/lecons/F3/39_FORM4_LESSON35_Precipitation.pptx
+++ b/lecons/F3/39_FORM4_LESSON35_Precipitation.pptx
@@ -3453,7 +3453,7 @@
           <a:p>
             <a:r>
               <a:rPr lang="en-US" dirty="0"/>
-              <a:t>Before we start the new lesson, let us correct the homework I gave you at the end of Lesson 34: Condensation. The question was: During the next rain, put an empty tin with straight sides in an open place. After the rain, measure the depth of water in it with a ruler, in millimetres. Take out your exercise books.</a:t>
+              <a:t>Before we start the new lesson, let us correct the homework I gave you at the end of Lesson 34: Condensation. The question was: Name the three types of rainfall. Take out your exercise books.</a:t>
             </a:r>
             <a:endParaRPr lang="en-US" dirty="0"/>
           </a:p>
@@ -3717,7 +3717,7 @@
           <a:p>
             <a:r>
               <a:rPr lang="en-US" dirty="0"/>
-              <a:t>For your homework: Observe the wind in Garoua for three days: from which direction does it blow? Is it dry or moist? Write your observations. We shall correct it at the beginning of our next lesson.</a:t>
+              <a:t>For your homework: Name the pressure belt found at the Equator. We shall correct it at the beginning of our next lesson.</a:t>
             </a:r>
             <a:endParaRPr lang="en-US" dirty="0"/>
           </a:p>
@@ -4333,7 +4333,7 @@
           <a:p>
             <a:r>
               <a:rPr lang="en-US" dirty="0"/>
-              <a:t>Here is a good answer. Answers vary. Example: the tin held 15 mm of water after the storm, so about 15 mm of rain fell. Compare it with your own answer and correct your work in red.</a:t>
+              <a:t>Here is a good answer. Convectional, relief (orographic) and frontal rainfall. Compare it with your own answer and correct your work in red.</a:t>
             </a:r>
             <a:endParaRPr lang="en-US" dirty="0"/>
           </a:p>
@@ -14706,7 +14706,7 @@
         <p:spPr>
           <a:xfrm>
             <a:off x="0" y="658368"/>
-            <a:ext cx="3840480" cy="5833872"/>
+            <a:ext cx="5120640" cy="5833872"/>
           </a:xfrm>
           <a:prstGeom prst="rect">
             <a:avLst/>
@@ -14721,8 +14721,8 @@
         </p:nvSpPr>
         <p:spPr>
           <a:xfrm>
-            <a:off x="4069080" y="1005840"/>
-            <a:ext cx="7802575" cy="731520"/>
+            <a:off x="5349240" y="1005840"/>
+            <a:ext cx="6522415" cy="731520"/>
           </a:xfrm>
           <a:prstGeom prst="rect">
             <a:avLst/>
@@ -14762,8 +14762,8 @@
         </p:nvSpPr>
         <p:spPr>
           <a:xfrm>
-            <a:off x="4069080" y="1783080"/>
-            <a:ext cx="7802575" cy="4663440"/>
+            <a:off x="5349240" y="1783080"/>
+            <a:ext cx="6522415" cy="4663440"/>
           </a:xfrm>
           <a:prstGeom prst="rect">
             <a:avLst/>
@@ -14810,7 +14810,7 @@
                 <a:ea typeface="Times New Roman" pitchFamily="34" charset="-122"/>
                 <a:cs typeface="Times New Roman" pitchFamily="34" charset="-120"/>
               </a:rPr>
-              <a:t>During the next rain, put an empty tin with straight sides in an open place. After the rain, measure the depth of water in it with a ruler, in millimetres.</a:t>
+              <a:t>Name the three types of rainfall.</a:t>
             </a:r>
             <a:endParaRPr lang="en-US" sz="4000" dirty="0"/>
           </a:p>
@@ -15533,7 +15533,7 @@
                 <a:ea typeface="Times New Roman" pitchFamily="34" charset="-122"/>
                 <a:cs typeface="Times New Roman" pitchFamily="34" charset="-120"/>
               </a:rPr>
-              <a:t>Observe the wind in Garoua for three days: from which direction does it blow? Is it dry or moist? Write your observations.</a:t>
+              <a:t>Name the pressure belt found at the Equator.</a:t>
             </a:r>
             <a:endParaRPr lang="en-US" sz="4000" dirty="0"/>
           </a:p>
@@ -18473,7 +18473,7 @@
                           <a:ea typeface="Calibri" pitchFamily="34" charset="-122"/>
                           <a:cs typeface="Calibri" pitchFamily="34" charset="-120"/>
                         </a:rPr>
-                        <a:t>Observe the wind in Garoua for three days: from which direction does it blow? Is it dry or moist? Write your observations.</a:t>
+                        <a:t>Name the pressure belt found at the Equator.</a:t>
                       </a:r>
                       <a:endParaRPr lang="en-US" sz="1600" dirty="0">
                         <a:latin typeface="Calibri" charset="0"/>
@@ -19626,7 +19626,7 @@
                 <a:ea typeface="Times New Roman" pitchFamily="34" charset="-122"/>
                 <a:cs typeface="Times New Roman" pitchFamily="34" charset="-120"/>
               </a:rPr>
-              <a:t>Answers vary. Example: the tin held 15 mm of water after the storm, so about 15 mm of rain fell.</a:t>
+              <a:t>Convectional, relief (orographic) and frontal rainfall.</a:t>
             </a:r>
             <a:endParaRPr lang="en-US" sz="4000" dirty="0"/>
           </a:p>
